--- a/DSP_Presentation.pptx
+++ b/DSP_Presentation.pptx
@@ -10,8 +10,8 @@
     <p:sldId id="258" r:id="rId4"/>
     <p:sldId id="259" r:id="rId5"/>
     <p:sldId id="260" r:id="rId6"/>
-    <p:sldId id="261" r:id="rId7"/>
-    <p:sldId id="262" r:id="rId8"/>
+    <p:sldId id="262" r:id="rId7"/>
+    <p:sldId id="261" r:id="rId8"/>
     <p:sldId id="263" r:id="rId9"/>
     <p:sldId id="264" r:id="rId10"/>
     <p:sldId id="265" r:id="rId11"/>
@@ -12248,7 +12248,7 @@
                 </a:solidFill>
                 <a:latin typeface="Calibri"/>
               </a:rPr>
-              <a:t>04  MACHINE LEARNING</a:t>
+              <a:t>03  THIẾT KẾ</a:t>
             </a:r>
           </a:p>
         </p:txBody>
@@ -12262,7 +12262,7 @@
         <p:spPr>
           <a:xfrm>
             <a:off x="457200" y="548640"/>
-            <a:ext cx="10058400" cy="502920"/>
+            <a:ext cx="9144000" cy="502920"/>
           </a:xfrm>
           <a:prstGeom prst="rect">
             <a:avLst/>
@@ -12283,7 +12283,7 @@
                 </a:solidFill>
                 <a:latin typeface="Calibri"/>
               </a:rPr>
-              <a:t>MFCC · SVM · Random Forest</a:t>
+              <a:t>Sơ Đồ Hệ Thống</a:t>
             </a:r>
           </a:p>
         </p:txBody>
@@ -12297,7 +12297,7 @@
         <p:spPr>
           <a:xfrm>
             <a:off x="457200" y="1097280"/>
-            <a:ext cx="5303520" cy="36576"/>
+            <a:ext cx="3657600" cy="36576"/>
           </a:xfrm>
           <a:prstGeom prst="rect">
             <a:avLst/>
@@ -12334,128 +12334,49 @@
       </p:sp>
       <p:sp>
         <p:nvSpPr>
-          <p:cNvPr id="7" name="Rectangle 6"/>
+          <p:cNvPr id="7" name="TextBox 6"/>
+          <p:cNvSpPr txBox="1"/>
+          <p:nvPr/>
+        </p:nvSpPr>
+        <p:spPr>
+          <a:xfrm>
+            <a:off x="457200" y="1325880"/>
+            <a:ext cx="5486400" cy="347472"/>
+          </a:xfrm>
+          <a:prstGeom prst="rect">
+            <a:avLst/>
+          </a:prstGeom>
+          <a:noFill/>
+        </p:spPr>
+        <p:txBody>
+          <a:bodyPr wrap="square">
+            <a:spAutoFit/>
+          </a:bodyPr>
+          <a:lstStyle/>
+          <a:p>
+            <a:pPr algn="l"/>
+            <a:r>
+              <a:rPr sz="1300" b="1" i="0">
+                <a:solidFill>
+                  <a:srgbClr val="00D4FF"/>
+                </a:solidFill>
+                <a:latin typeface="Calibri"/>
+              </a:rPr>
+              <a:t>Equalizer Pipeline</a:t>
+            </a:r>
+          </a:p>
+        </p:txBody>
+      </p:sp>
+      <p:sp>
+        <p:nvSpPr>
+          <p:cNvPr id="8" name="Rectangle 7"/>
           <p:cNvSpPr/>
           <p:nvPr/>
         </p:nvSpPr>
         <p:spPr>
           <a:xfrm>
-            <a:off x="365760" y="1417320"/>
-            <a:ext cx="1280160" cy="685800"/>
-          </a:xfrm>
-          <a:prstGeom prst="rect">
-            <a:avLst/>
-          </a:prstGeom>
-          <a:solidFill>
-            <a:srgbClr val="00D4FF"/>
-          </a:solidFill>
-          <a:ln>
-            <a:noFill/>
-          </a:ln>
-        </p:spPr>
-        <p:style>
-          <a:lnRef idx="1">
-            <a:schemeClr val="accent1"/>
-          </a:lnRef>
-          <a:fillRef idx="3">
-            <a:schemeClr val="accent1"/>
-          </a:fillRef>
-          <a:effectRef idx="2">
-            <a:schemeClr val="accent1"/>
-          </a:effectRef>
-          <a:fontRef idx="minor">
-            <a:schemeClr val="lt1"/>
-          </a:fontRef>
-        </p:style>
-        <p:txBody>
-          <a:bodyPr rtlCol="0" anchor="ctr"/>
-          <a:lstStyle/>
-          <a:p>
-            <a:pPr algn="ctr"/>
-            <a:endParaRPr/>
-          </a:p>
-        </p:txBody>
-      </p:sp>
-      <p:sp>
-        <p:nvSpPr>
-          <p:cNvPr id="8" name="TextBox 7"/>
-          <p:cNvSpPr txBox="1"/>
-          <p:nvPr/>
-        </p:nvSpPr>
-        <p:spPr>
-          <a:xfrm>
-            <a:off x="365760" y="1417320"/>
-            <a:ext cx="1280160" cy="685800"/>
-          </a:xfrm>
-          <a:prstGeom prst="rect">
-            <a:avLst/>
-          </a:prstGeom>
-          <a:noFill/>
-        </p:spPr>
-        <p:txBody>
-          <a:bodyPr wrap="square">
-            <a:spAutoFit/>
-          </a:bodyPr>
-          <a:lstStyle/>
-          <a:p>
-            <a:pPr algn="ctr"/>
-            <a:r>
-              <a:rPr sz="1050" b="1" i="0">
-                <a:solidFill>
-                  <a:srgbClr val="0D1B2A"/>
-                </a:solidFill>
-                <a:latin typeface="Calibri"/>
-              </a:rPr>
-              <a:t>Audio</a:t>
-            </a:r>
-          </a:p>
-        </p:txBody>
-      </p:sp>
-      <p:sp>
-        <p:nvSpPr>
-          <p:cNvPr id="9" name="TextBox 8"/>
-          <p:cNvSpPr txBox="1"/>
-          <p:nvPr/>
-        </p:nvSpPr>
-        <p:spPr>
-          <a:xfrm>
-            <a:off x="1682496" y="1600200"/>
-            <a:ext cx="228600" cy="320040"/>
-          </a:xfrm>
-          <a:prstGeom prst="rect">
-            <a:avLst/>
-          </a:prstGeom>
-          <a:noFill/>
-        </p:spPr>
-        <p:txBody>
-          <a:bodyPr wrap="square">
-            <a:spAutoFit/>
-          </a:bodyPr>
-          <a:lstStyle/>
-          <a:p>
-            <a:pPr algn="l"/>
-            <a:r>
-              <a:rPr sz="1300" b="0" i="0">
-                <a:solidFill>
-                  <a:srgbClr val="00D4FF"/>
-                </a:solidFill>
-                <a:latin typeface="Calibri"/>
-              </a:rPr>
-              <a:t>→</a:t>
-            </a:r>
-          </a:p>
-        </p:txBody>
-      </p:sp>
-      <p:sp>
-        <p:nvSpPr>
-          <p:cNvPr id="10" name="Rectangle 9"/>
-          <p:cNvSpPr/>
-          <p:nvPr/>
-        </p:nvSpPr>
-        <p:spPr>
-          <a:xfrm>
-            <a:off x="2011680" y="1417320"/>
-            <a:ext cx="1280160" cy="685800"/>
+            <a:off x="457200" y="1737360"/>
+            <a:ext cx="1554480" cy="731520"/>
           </a:xfrm>
           <a:prstGeom prst="rect">
             <a:avLst/>
@@ -12492,14 +12413,14 @@
       </p:sp>
       <p:sp>
         <p:nvSpPr>
-          <p:cNvPr id="11" name="TextBox 10"/>
-          <p:cNvSpPr txBox="1"/>
-          <p:nvPr/>
-        </p:nvSpPr>
-        <p:spPr>
-          <a:xfrm>
-            <a:off x="2011680" y="1417320"/>
-            <a:ext cx="1280160" cy="685800"/>
+          <p:cNvPr id="9" name="TextBox 8"/>
+          <p:cNvSpPr txBox="1"/>
+          <p:nvPr/>
+        </p:nvSpPr>
+        <p:spPr>
+          <a:xfrm>
+            <a:off x="457200" y="1737360"/>
+            <a:ext cx="1554480" cy="731520"/>
           </a:xfrm>
           <a:prstGeom prst="rect">
             <a:avLst/>
@@ -12514,27 +12435,28 @@
           <a:p>
             <a:pPr algn="ctr"/>
             <a:r>
-              <a:rPr sz="1050" b="1" i="0">
+              <a:rPr sz="1000" b="1" i="0">
                 <a:solidFill>
                   <a:srgbClr val="FFFFFF"/>
                 </a:solidFill>
                 <a:latin typeface="Calibri"/>
               </a:rPr>
-              <a:t>FFT</a:t>
-            </a:r>
-          </a:p>
-        </p:txBody>
-      </p:sp>
-      <p:sp>
-        <p:nvSpPr>
-          <p:cNvPr id="12" name="TextBox 11"/>
-          <p:cNvSpPr txBox="1"/>
-          <p:nvPr/>
-        </p:nvSpPr>
-        <p:spPr>
-          <a:xfrm>
-            <a:off x="3328416" y="1600200"/>
-            <a:ext cx="228600" cy="320040"/>
+              <a:t>Load
+.wav</a:t>
+            </a:r>
+          </a:p>
+        </p:txBody>
+      </p:sp>
+      <p:sp>
+        <p:nvSpPr>
+          <p:cNvPr id="10" name="TextBox 9"/>
+          <p:cNvSpPr txBox="1"/>
+          <p:nvPr/>
+        </p:nvSpPr>
+        <p:spPr>
+          <a:xfrm>
+            <a:off x="2029968" y="1920240"/>
+            <a:ext cx="256032" cy="365760"/>
           </a:xfrm>
           <a:prstGeom prst="rect">
             <a:avLst/>
@@ -12562,14 +12484,14 @@
       </p:sp>
       <p:sp>
         <p:nvSpPr>
-          <p:cNvPr id="13" name="Rectangle 12"/>
+          <p:cNvPr id="11" name="Rectangle 10"/>
           <p:cNvSpPr/>
           <p:nvPr/>
         </p:nvSpPr>
         <p:spPr>
           <a:xfrm>
-            <a:off x="3657600" y="1417320"/>
-            <a:ext cx="1280160" cy="685800"/>
+            <a:off x="2304288" y="1737360"/>
+            <a:ext cx="1554480" cy="731520"/>
           </a:xfrm>
           <a:prstGeom prst="rect">
             <a:avLst/>
@@ -12606,14 +12528,14 @@
       </p:sp>
       <p:sp>
         <p:nvSpPr>
-          <p:cNvPr id="14" name="TextBox 13"/>
-          <p:cNvSpPr txBox="1"/>
-          <p:nvPr/>
-        </p:nvSpPr>
-        <p:spPr>
-          <a:xfrm>
-            <a:off x="3657600" y="1417320"/>
-            <a:ext cx="1280160" cy="685800"/>
+          <p:cNvPr id="12" name="TextBox 11"/>
+          <p:cNvSpPr txBox="1"/>
+          <p:nvPr/>
+        </p:nvSpPr>
+        <p:spPr>
+          <a:xfrm>
+            <a:off x="2304288" y="1737360"/>
+            <a:ext cx="1554480" cy="731520"/>
           </a:xfrm>
           <a:prstGeom prst="rect">
             <a:avLst/>
@@ -12628,28 +12550,28 @@
           <a:p>
             <a:pPr algn="ctr"/>
             <a:r>
-              <a:rPr sz="1050" b="1" i="0">
+              <a:rPr sz="1000" b="1" i="0">
                 <a:solidFill>
                   <a:srgbClr val="FFFFFF"/>
                 </a:solidFill>
                 <a:latin typeface="Calibri"/>
               </a:rPr>
-              <a:t>Mel
-Filterbank</a:t>
-            </a:r>
-          </a:p>
-        </p:txBody>
-      </p:sp>
-      <p:sp>
-        <p:nvSpPr>
-          <p:cNvPr id="15" name="TextBox 14"/>
-          <p:cNvSpPr txBox="1"/>
-          <p:nvPr/>
-        </p:nvSpPr>
-        <p:spPr>
-          <a:xfrm>
-            <a:off x="4974336" y="1600200"/>
-            <a:ext cx="228600" cy="320040"/>
+              <a:t>Filter Bank
+(10 FIR)</a:t>
+            </a:r>
+          </a:p>
+        </p:txBody>
+      </p:sp>
+      <p:sp>
+        <p:nvSpPr>
+          <p:cNvPr id="13" name="TextBox 12"/>
+          <p:cNvSpPr txBox="1"/>
+          <p:nvPr/>
+        </p:nvSpPr>
+        <p:spPr>
+          <a:xfrm>
+            <a:off x="3877056" y="1920240"/>
+            <a:ext cx="256032" cy="365760"/>
           </a:xfrm>
           <a:prstGeom prst="rect">
             <a:avLst/>
@@ -12677,14 +12599,14 @@
       </p:sp>
       <p:sp>
         <p:nvSpPr>
-          <p:cNvPr id="16" name="Rectangle 15"/>
+          <p:cNvPr id="14" name="Rectangle 13"/>
           <p:cNvSpPr/>
           <p:nvPr/>
         </p:nvSpPr>
         <p:spPr>
           <a:xfrm>
-            <a:off x="5303520" y="1417320"/>
-            <a:ext cx="1280160" cy="685800"/>
+            <a:off x="4151376" y="1737360"/>
+            <a:ext cx="1554480" cy="731520"/>
           </a:xfrm>
           <a:prstGeom prst="rect">
             <a:avLst/>
@@ -12721,14 +12643,14 @@
       </p:sp>
       <p:sp>
         <p:nvSpPr>
-          <p:cNvPr id="17" name="TextBox 16"/>
-          <p:cNvSpPr txBox="1"/>
-          <p:nvPr/>
-        </p:nvSpPr>
-        <p:spPr>
-          <a:xfrm>
-            <a:off x="5303520" y="1417320"/>
-            <a:ext cx="1280160" cy="685800"/>
+          <p:cNvPr id="15" name="TextBox 14"/>
+          <p:cNvSpPr txBox="1"/>
+          <p:nvPr/>
+        </p:nvSpPr>
+        <p:spPr>
+          <a:xfrm>
+            <a:off x="4151376" y="1737360"/>
+            <a:ext cx="1554480" cy="731520"/>
           </a:xfrm>
           <a:prstGeom prst="rect">
             <a:avLst/>
@@ -12743,27 +12665,28 @@
           <a:p>
             <a:pPr algn="ctr"/>
             <a:r>
-              <a:rPr sz="1050" b="1" i="0">
+              <a:rPr sz="1000" b="1" i="0">
                 <a:solidFill>
                   <a:srgbClr val="FFFFFF"/>
                 </a:solidFill>
                 <a:latin typeface="Calibri"/>
               </a:rPr>
-              <a:t>log + DCT</a:t>
-            </a:r>
-          </a:p>
-        </p:txBody>
-      </p:sp>
-      <p:sp>
-        <p:nvSpPr>
-          <p:cNvPr id="18" name="TextBox 17"/>
-          <p:cNvSpPr txBox="1"/>
-          <p:nvPr/>
-        </p:nvSpPr>
-        <p:spPr>
-          <a:xfrm>
-            <a:off x="6620256" y="1600200"/>
-            <a:ext cx="228600" cy="320040"/>
+              <a:t>Apply Gain
+(±12 dB)</a:t>
+            </a:r>
+          </a:p>
+        </p:txBody>
+      </p:sp>
+      <p:sp>
+        <p:nvSpPr>
+          <p:cNvPr id="16" name="TextBox 15"/>
+          <p:cNvSpPr txBox="1"/>
+          <p:nvPr/>
+        </p:nvSpPr>
+        <p:spPr>
+          <a:xfrm>
+            <a:off x="5724144" y="1920240"/>
+            <a:ext cx="256032" cy="365760"/>
           </a:xfrm>
           <a:prstGeom prst="rect">
             <a:avLst/>
@@ -12791,323 +12714,14 @@
       </p:sp>
       <p:sp>
         <p:nvSpPr>
-          <p:cNvPr id="19" name="Rectangle 18"/>
+          <p:cNvPr id="17" name="Rectangle 16"/>
           <p:cNvSpPr/>
           <p:nvPr/>
         </p:nvSpPr>
         <p:spPr>
           <a:xfrm>
-            <a:off x="6949440" y="1417320"/>
-            <a:ext cx="1280160" cy="685800"/>
-          </a:xfrm>
-          <a:prstGeom prst="rect">
-            <a:avLst/>
-          </a:prstGeom>
-          <a:solidFill>
-            <a:srgbClr val="00D4FF"/>
-          </a:solidFill>
-          <a:ln>
-            <a:noFill/>
-          </a:ln>
-        </p:spPr>
-        <p:style>
-          <a:lnRef idx="1">
-            <a:schemeClr val="accent1"/>
-          </a:lnRef>
-          <a:fillRef idx="3">
-            <a:schemeClr val="accent1"/>
-          </a:fillRef>
-          <a:effectRef idx="2">
-            <a:schemeClr val="accent1"/>
-          </a:effectRef>
-          <a:fontRef idx="minor">
-            <a:schemeClr val="lt1"/>
-          </a:fontRef>
-        </p:style>
-        <p:txBody>
-          <a:bodyPr rtlCol="0" anchor="ctr"/>
-          <a:lstStyle/>
-          <a:p>
-            <a:pPr algn="ctr"/>
-            <a:endParaRPr/>
-          </a:p>
-        </p:txBody>
-      </p:sp>
-      <p:sp>
-        <p:nvSpPr>
-          <p:cNvPr id="20" name="TextBox 19"/>
-          <p:cNvSpPr txBox="1"/>
-          <p:nvPr/>
-        </p:nvSpPr>
-        <p:spPr>
-          <a:xfrm>
-            <a:off x="6949440" y="1417320"/>
-            <a:ext cx="1280160" cy="685800"/>
-          </a:xfrm>
-          <a:prstGeom prst="rect">
-            <a:avLst/>
-          </a:prstGeom>
-          <a:noFill/>
-        </p:spPr>
-        <p:txBody>
-          <a:bodyPr wrap="square">
-            <a:spAutoFit/>
-          </a:bodyPr>
-          <a:lstStyle/>
-          <a:p>
-            <a:pPr algn="ctr"/>
-            <a:r>
-              <a:rPr sz="1050" b="1" i="0">
-                <a:solidFill>
-                  <a:srgbClr val="0D1B2A"/>
-                </a:solidFill>
-                <a:latin typeface="Calibri"/>
-              </a:rPr>
-              <a:t>MFCC
-(20 coeff)</a:t>
-            </a:r>
-          </a:p>
-        </p:txBody>
-      </p:sp>
-      <p:sp>
-        <p:nvSpPr>
-          <p:cNvPr id="21" name="TextBox 20"/>
-          <p:cNvSpPr txBox="1"/>
-          <p:nvPr/>
-        </p:nvSpPr>
-        <p:spPr>
-          <a:xfrm>
-            <a:off x="8266176" y="1600200"/>
-            <a:ext cx="228600" cy="320040"/>
-          </a:xfrm>
-          <a:prstGeom prst="rect">
-            <a:avLst/>
-          </a:prstGeom>
-          <a:noFill/>
-        </p:spPr>
-        <p:txBody>
-          <a:bodyPr wrap="square">
-            <a:spAutoFit/>
-          </a:bodyPr>
-          <a:lstStyle/>
-          <a:p>
-            <a:pPr algn="l"/>
-            <a:r>
-              <a:rPr sz="1300" b="0" i="0">
-                <a:solidFill>
-                  <a:srgbClr val="00D4FF"/>
-                </a:solidFill>
-                <a:latin typeface="Calibri"/>
-              </a:rPr>
-              <a:t>→</a:t>
-            </a:r>
-          </a:p>
-        </p:txBody>
-      </p:sp>
-      <p:sp>
-        <p:nvSpPr>
-          <p:cNvPr id="22" name="Rectangle 21"/>
-          <p:cNvSpPr/>
-          <p:nvPr/>
-        </p:nvSpPr>
-        <p:spPr>
-          <a:xfrm>
-            <a:off x="8595360" y="1417320"/>
-            <a:ext cx="1280160" cy="685800"/>
-          </a:xfrm>
-          <a:prstGeom prst="rect">
-            <a:avLst/>
-          </a:prstGeom>
-          <a:solidFill>
-            <a:srgbClr val="00D4FF"/>
-          </a:solidFill>
-          <a:ln>
-            <a:noFill/>
-          </a:ln>
-        </p:spPr>
-        <p:style>
-          <a:lnRef idx="1">
-            <a:schemeClr val="accent1"/>
-          </a:lnRef>
-          <a:fillRef idx="3">
-            <a:schemeClr val="accent1"/>
-          </a:fillRef>
-          <a:effectRef idx="2">
-            <a:schemeClr val="accent1"/>
-          </a:effectRef>
-          <a:fontRef idx="minor">
-            <a:schemeClr val="lt1"/>
-          </a:fontRef>
-        </p:style>
-        <p:txBody>
-          <a:bodyPr rtlCol="0" anchor="ctr"/>
-          <a:lstStyle/>
-          <a:p>
-            <a:pPr algn="ctr"/>
-            <a:endParaRPr/>
-          </a:p>
-        </p:txBody>
-      </p:sp>
-      <p:sp>
-        <p:nvSpPr>
-          <p:cNvPr id="23" name="TextBox 22"/>
-          <p:cNvSpPr txBox="1"/>
-          <p:nvPr/>
-        </p:nvSpPr>
-        <p:spPr>
-          <a:xfrm>
-            <a:off x="8595360" y="1417320"/>
-            <a:ext cx="1280160" cy="685800"/>
-          </a:xfrm>
-          <a:prstGeom prst="rect">
-            <a:avLst/>
-          </a:prstGeom>
-          <a:noFill/>
-        </p:spPr>
-        <p:txBody>
-          <a:bodyPr wrap="square">
-            <a:spAutoFit/>
-          </a:bodyPr>
-          <a:lstStyle/>
-          <a:p>
-            <a:pPr algn="ctr"/>
-            <a:r>
-              <a:rPr sz="1050" b="1" i="0">
-                <a:solidFill>
-                  <a:srgbClr val="0D1B2A"/>
-                </a:solidFill>
-                <a:latin typeface="Calibri"/>
-              </a:rPr>
-              <a:t>Mean+Std
-→ 40 feat</a:t>
-            </a:r>
-          </a:p>
-        </p:txBody>
-      </p:sp>
-      <p:sp>
-        <p:nvSpPr>
-          <p:cNvPr id="24" name="TextBox 23"/>
-          <p:cNvSpPr txBox="1"/>
-          <p:nvPr/>
-        </p:nvSpPr>
-        <p:spPr>
-          <a:xfrm>
-            <a:off x="9912096" y="1600200"/>
-            <a:ext cx="228600" cy="320040"/>
-          </a:xfrm>
-          <a:prstGeom prst="rect">
-            <a:avLst/>
-          </a:prstGeom>
-          <a:noFill/>
-        </p:spPr>
-        <p:txBody>
-          <a:bodyPr wrap="square">
-            <a:spAutoFit/>
-          </a:bodyPr>
-          <a:lstStyle/>
-          <a:p>
-            <a:pPr algn="l"/>
-            <a:r>
-              <a:rPr sz="1300" b="0" i="0">
-                <a:solidFill>
-                  <a:srgbClr val="00D4FF"/>
-                </a:solidFill>
-                <a:latin typeface="Calibri"/>
-              </a:rPr>
-              <a:t>→</a:t>
-            </a:r>
-          </a:p>
-        </p:txBody>
-      </p:sp>
-      <p:sp>
-        <p:nvSpPr>
-          <p:cNvPr id="25" name="Rectangle 24"/>
-          <p:cNvSpPr/>
-          <p:nvPr/>
-        </p:nvSpPr>
-        <p:spPr>
-          <a:xfrm>
-            <a:off x="10241280" y="1417320"/>
-            <a:ext cx="1280160" cy="685800"/>
-          </a:xfrm>
-          <a:prstGeom prst="rect">
-            <a:avLst/>
-          </a:prstGeom>
-          <a:solidFill>
-            <a:srgbClr val="00D4FF"/>
-          </a:solidFill>
-          <a:ln>
-            <a:noFill/>
-          </a:ln>
-        </p:spPr>
-        <p:style>
-          <a:lnRef idx="1">
-            <a:schemeClr val="accent1"/>
-          </a:lnRef>
-          <a:fillRef idx="3">
-            <a:schemeClr val="accent1"/>
-          </a:fillRef>
-          <a:effectRef idx="2">
-            <a:schemeClr val="accent1"/>
-          </a:effectRef>
-          <a:fontRef idx="minor">
-            <a:schemeClr val="lt1"/>
-          </a:fontRef>
-        </p:style>
-        <p:txBody>
-          <a:bodyPr rtlCol="0" anchor="ctr"/>
-          <a:lstStyle/>
-          <a:p>
-            <a:pPr algn="ctr"/>
-            <a:endParaRPr/>
-          </a:p>
-        </p:txBody>
-      </p:sp>
-      <p:sp>
-        <p:nvSpPr>
-          <p:cNvPr id="26" name="TextBox 25"/>
-          <p:cNvSpPr txBox="1"/>
-          <p:nvPr/>
-        </p:nvSpPr>
-        <p:spPr>
-          <a:xfrm>
-            <a:off x="10241280" y="1417320"/>
-            <a:ext cx="1280160" cy="685800"/>
-          </a:xfrm>
-          <a:prstGeom prst="rect">
-            <a:avLst/>
-          </a:prstGeom>
-          <a:noFill/>
-        </p:spPr>
-        <p:txBody>
-          <a:bodyPr wrap="square">
-            <a:spAutoFit/>
-          </a:bodyPr>
-          <a:lstStyle/>
-          <a:p>
-            <a:pPr algn="ctr"/>
-            <a:r>
-              <a:rPr sz="1050" b="1" i="0">
-                <a:solidFill>
-                  <a:srgbClr val="0D1B2A"/>
-                </a:solidFill>
-                <a:latin typeface="Calibri"/>
-              </a:rPr>
-              <a:t>Model</a:t>
-            </a:r>
-          </a:p>
-        </p:txBody>
-      </p:sp>
-      <p:sp>
-        <p:nvSpPr>
-          <p:cNvPr id="27" name="Rectangle 26"/>
-          <p:cNvSpPr/>
-          <p:nvPr/>
-        </p:nvSpPr>
-        <p:spPr>
-          <a:xfrm>
-            <a:off x="457200" y="2423160"/>
-            <a:ext cx="3657600" cy="2560320"/>
+            <a:off x="5998464" y="1737360"/>
+            <a:ext cx="1554480" cy="731520"/>
           </a:xfrm>
           <a:prstGeom prst="rect">
             <a:avLst/>
@@ -13144,130 +12758,85 @@
       </p:sp>
       <p:sp>
         <p:nvSpPr>
-          <p:cNvPr id="28" name="Rectangle 27"/>
+          <p:cNvPr id="18" name="TextBox 17"/>
+          <p:cNvSpPr txBox="1"/>
+          <p:nvPr/>
+        </p:nvSpPr>
+        <p:spPr>
+          <a:xfrm>
+            <a:off x="5998464" y="1737360"/>
+            <a:ext cx="1554480" cy="731520"/>
+          </a:xfrm>
+          <a:prstGeom prst="rect">
+            <a:avLst/>
+          </a:prstGeom>
+          <a:noFill/>
+        </p:spPr>
+        <p:txBody>
+          <a:bodyPr wrap="square">
+            <a:spAutoFit/>
+          </a:bodyPr>
+          <a:lstStyle/>
+          <a:p>
+            <a:pPr algn="ctr"/>
+            <a:r>
+              <a:rPr sz="1000" b="1" i="0">
+                <a:solidFill>
+                  <a:srgbClr val="FFFFFF"/>
+                </a:solidFill>
+                <a:latin typeface="Calibri"/>
+              </a:rPr>
+              <a:t>Sum
+Bands</a:t>
+            </a:r>
+          </a:p>
+        </p:txBody>
+      </p:sp>
+      <p:sp>
+        <p:nvSpPr>
+          <p:cNvPr id="19" name="TextBox 18"/>
+          <p:cNvSpPr txBox="1"/>
+          <p:nvPr/>
+        </p:nvSpPr>
+        <p:spPr>
+          <a:xfrm>
+            <a:off x="7571232" y="1920240"/>
+            <a:ext cx="256032" cy="365760"/>
+          </a:xfrm>
+          <a:prstGeom prst="rect">
+            <a:avLst/>
+          </a:prstGeom>
+          <a:noFill/>
+        </p:spPr>
+        <p:txBody>
+          <a:bodyPr wrap="square">
+            <a:spAutoFit/>
+          </a:bodyPr>
+          <a:lstStyle/>
+          <a:p>
+            <a:pPr algn="l"/>
+            <a:r>
+              <a:rPr sz="1300" b="0" i="0">
+                <a:solidFill>
+                  <a:srgbClr val="00D4FF"/>
+                </a:solidFill>
+                <a:latin typeface="Calibri"/>
+              </a:rPr>
+              <a:t>→</a:t>
+            </a:r>
+          </a:p>
+        </p:txBody>
+      </p:sp>
+      <p:sp>
+        <p:nvSpPr>
+          <p:cNvPr id="20" name="Rectangle 19"/>
           <p:cNvSpPr/>
           <p:nvPr/>
         </p:nvSpPr>
         <p:spPr>
           <a:xfrm>
-            <a:off x="457200" y="2423160"/>
-            <a:ext cx="3657600" cy="91440"/>
-          </a:xfrm>
-          <a:prstGeom prst="rect">
-            <a:avLst/>
-          </a:prstGeom>
-          <a:solidFill>
-            <a:srgbClr val="00D4FF"/>
-          </a:solidFill>
-          <a:ln>
-            <a:noFill/>
-          </a:ln>
-        </p:spPr>
-        <p:style>
-          <a:lnRef idx="1">
-            <a:schemeClr val="accent1"/>
-          </a:lnRef>
-          <a:fillRef idx="3">
-            <a:schemeClr val="accent1"/>
-          </a:fillRef>
-          <a:effectRef idx="2">
-            <a:schemeClr val="accent1"/>
-          </a:effectRef>
-          <a:fontRef idx="minor">
-            <a:schemeClr val="lt1"/>
-          </a:fontRef>
-        </p:style>
-        <p:txBody>
-          <a:bodyPr rtlCol="0" anchor="ctr"/>
-          <a:lstStyle/>
-          <a:p>
-            <a:pPr algn="ctr"/>
-            <a:endParaRPr/>
-          </a:p>
-        </p:txBody>
-      </p:sp>
-      <p:sp>
-        <p:nvSpPr>
-          <p:cNvPr id="29" name="TextBox 28"/>
-          <p:cNvSpPr txBox="1"/>
-          <p:nvPr/>
-        </p:nvSpPr>
-        <p:spPr>
-          <a:xfrm>
-            <a:off x="566928" y="2542032"/>
-            <a:ext cx="3383280" cy="384048"/>
-          </a:xfrm>
-          <a:prstGeom prst="rect">
-            <a:avLst/>
-          </a:prstGeom>
-          <a:noFill/>
-        </p:spPr>
-        <p:txBody>
-          <a:bodyPr wrap="square">
-            <a:spAutoFit/>
-          </a:bodyPr>
-          <a:lstStyle/>
-          <a:p>
-            <a:pPr algn="l"/>
-            <a:r>
-              <a:rPr sz="1400" b="1" i="0">
-                <a:solidFill>
-                  <a:srgbClr val="00D4FF"/>
-                </a:solidFill>
-                <a:latin typeface="Calibri"/>
-              </a:rPr>
-              <a:t>MFCC Features</a:t>
-            </a:r>
-          </a:p>
-        </p:txBody>
-      </p:sp>
-      <p:sp>
-        <p:nvSpPr>
-          <p:cNvPr id="30" name="TextBox 29"/>
-          <p:cNvSpPr txBox="1"/>
-          <p:nvPr/>
-        </p:nvSpPr>
-        <p:spPr>
-          <a:xfrm>
-            <a:off x="566928" y="2971800"/>
-            <a:ext cx="3383280" cy="1920240"/>
-          </a:xfrm>
-          <a:prstGeom prst="rect">
-            <a:avLst/>
-          </a:prstGeom>
-          <a:noFill/>
-        </p:spPr>
-        <p:txBody>
-          <a:bodyPr wrap="square">
-            <a:spAutoFit/>
-          </a:bodyPr>
-          <a:lstStyle/>
-          <a:p>
-            <a:pPr algn="l"/>
-            <a:r>
-              <a:rPr sz="1200" b="0" i="0">
-                <a:solidFill>
-                  <a:srgbClr val="FFFFFF"/>
-                </a:solidFill>
-                <a:latin typeface="Calibri"/>
-              </a:rPr>
-              <a:t>20 coefficients per frame
-mean + std → 40-dim vector
-Mimics human hearing (Mel scale)</a:t>
-            </a:r>
-          </a:p>
-        </p:txBody>
-      </p:sp>
-      <p:sp>
-        <p:nvSpPr>
-          <p:cNvPr id="31" name="Rectangle 30"/>
-          <p:cNvSpPr/>
-          <p:nvPr/>
-        </p:nvSpPr>
-        <p:spPr>
-          <a:xfrm>
-            <a:off x="4297680" y="2423160"/>
-            <a:ext cx="3657600" cy="2560320"/>
+            <a:off x="7845552" y="1737360"/>
+            <a:ext cx="1554480" cy="731520"/>
           </a:xfrm>
           <a:prstGeom prst="rect">
             <a:avLst/>
@@ -13304,130 +12873,85 @@
       </p:sp>
       <p:sp>
         <p:nvSpPr>
-          <p:cNvPr id="32" name="Rectangle 31"/>
+          <p:cNvPr id="21" name="TextBox 20"/>
+          <p:cNvSpPr txBox="1"/>
+          <p:nvPr/>
+        </p:nvSpPr>
+        <p:spPr>
+          <a:xfrm>
+            <a:off x="7845552" y="1737360"/>
+            <a:ext cx="1554480" cy="731520"/>
+          </a:xfrm>
+          <a:prstGeom prst="rect">
+            <a:avLst/>
+          </a:prstGeom>
+          <a:noFill/>
+        </p:spPr>
+        <p:txBody>
+          <a:bodyPr wrap="square">
+            <a:spAutoFit/>
+          </a:bodyPr>
+          <a:lstStyle/>
+          <a:p>
+            <a:pPr algn="ctr"/>
+            <a:r>
+              <a:rPr sz="1000" b="1" i="0">
+                <a:solidFill>
+                  <a:srgbClr val="FFFFFF"/>
+                </a:solidFill>
+                <a:latin typeface="Calibri"/>
+              </a:rPr>
+              <a:t>Visualize
+FFT/Wave</a:t>
+            </a:r>
+          </a:p>
+        </p:txBody>
+      </p:sp>
+      <p:sp>
+        <p:nvSpPr>
+          <p:cNvPr id="22" name="TextBox 21"/>
+          <p:cNvSpPr txBox="1"/>
+          <p:nvPr/>
+        </p:nvSpPr>
+        <p:spPr>
+          <a:xfrm>
+            <a:off x="9418320" y="1920240"/>
+            <a:ext cx="256032" cy="365760"/>
+          </a:xfrm>
+          <a:prstGeom prst="rect">
+            <a:avLst/>
+          </a:prstGeom>
+          <a:noFill/>
+        </p:spPr>
+        <p:txBody>
+          <a:bodyPr wrap="square">
+            <a:spAutoFit/>
+          </a:bodyPr>
+          <a:lstStyle/>
+          <a:p>
+            <a:pPr algn="l"/>
+            <a:r>
+              <a:rPr sz="1300" b="0" i="0">
+                <a:solidFill>
+                  <a:srgbClr val="00D4FF"/>
+                </a:solidFill>
+                <a:latin typeface="Calibri"/>
+              </a:rPr>
+              <a:t>→</a:t>
+            </a:r>
+          </a:p>
+        </p:txBody>
+      </p:sp>
+      <p:sp>
+        <p:nvSpPr>
+          <p:cNvPr id="23" name="Rectangle 22"/>
           <p:cNvSpPr/>
           <p:nvPr/>
         </p:nvSpPr>
         <p:spPr>
           <a:xfrm>
-            <a:off x="4297680" y="2423160"/>
-            <a:ext cx="3657600" cy="91440"/>
-          </a:xfrm>
-          <a:prstGeom prst="rect">
-            <a:avLst/>
-          </a:prstGeom>
-          <a:solidFill>
-            <a:srgbClr val="7B2FFF"/>
-          </a:solidFill>
-          <a:ln>
-            <a:noFill/>
-          </a:ln>
-        </p:spPr>
-        <p:style>
-          <a:lnRef idx="1">
-            <a:schemeClr val="accent1"/>
-          </a:lnRef>
-          <a:fillRef idx="3">
-            <a:schemeClr val="accent1"/>
-          </a:fillRef>
-          <a:effectRef idx="2">
-            <a:schemeClr val="accent1"/>
-          </a:effectRef>
-          <a:fontRef idx="minor">
-            <a:schemeClr val="lt1"/>
-          </a:fontRef>
-        </p:style>
-        <p:txBody>
-          <a:bodyPr rtlCol="0" anchor="ctr"/>
-          <a:lstStyle/>
-          <a:p>
-            <a:pPr algn="ctr"/>
-            <a:endParaRPr/>
-          </a:p>
-        </p:txBody>
-      </p:sp>
-      <p:sp>
-        <p:nvSpPr>
-          <p:cNvPr id="33" name="TextBox 32"/>
-          <p:cNvSpPr txBox="1"/>
-          <p:nvPr/>
-        </p:nvSpPr>
-        <p:spPr>
-          <a:xfrm>
-            <a:off x="4407408" y="2542032"/>
-            <a:ext cx="3383280" cy="384048"/>
-          </a:xfrm>
-          <a:prstGeom prst="rect">
-            <a:avLst/>
-          </a:prstGeom>
-          <a:noFill/>
-        </p:spPr>
-        <p:txBody>
-          <a:bodyPr wrap="square">
-            <a:spAutoFit/>
-          </a:bodyPr>
-          <a:lstStyle/>
-          <a:p>
-            <a:pPr algn="l"/>
-            <a:r>
-              <a:rPr sz="1400" b="1" i="0">
-                <a:solidFill>
-                  <a:srgbClr val="7B2FFF"/>
-                </a:solidFill>
-                <a:latin typeface="Calibri"/>
-              </a:rPr>
-              <a:t>SVM — Kernel RBF</a:t>
-            </a:r>
-          </a:p>
-        </p:txBody>
-      </p:sp>
-      <p:sp>
-        <p:nvSpPr>
-          <p:cNvPr id="34" name="TextBox 33"/>
-          <p:cNvSpPr txBox="1"/>
-          <p:nvPr/>
-        </p:nvSpPr>
-        <p:spPr>
-          <a:xfrm>
-            <a:off x="4407408" y="2971800"/>
-            <a:ext cx="3383280" cy="1920240"/>
-          </a:xfrm>
-          <a:prstGeom prst="rect">
-            <a:avLst/>
-          </a:prstGeom>
-          <a:noFill/>
-        </p:spPr>
-        <p:txBody>
-          <a:bodyPr wrap="square">
-            <a:spAutoFit/>
-          </a:bodyPr>
-          <a:lstStyle/>
-          <a:p>
-            <a:pPr algn="l"/>
-            <a:r>
-              <a:rPr sz="1200" b="0" i="0">
-                <a:solidFill>
-                  <a:srgbClr val="FFFFFF"/>
-                </a:solidFill>
-                <a:latin typeface="Calibri"/>
-              </a:rPr>
-              <a:t>K(x,x') = exp(−γ||x−x'||²)
-Max-margin hyperplane
-Accuracy: 62.6%</a:t>
-            </a:r>
-          </a:p>
-        </p:txBody>
-      </p:sp>
-      <p:sp>
-        <p:nvSpPr>
-          <p:cNvPr id="35" name="Rectangle 34"/>
-          <p:cNvSpPr/>
-          <p:nvPr/>
-        </p:nvSpPr>
-        <p:spPr>
-          <a:xfrm>
-            <a:off x="8138160" y="2423160"/>
-            <a:ext cx="3657600" cy="2560320"/>
+            <a:off x="9692640" y="1737360"/>
+            <a:ext cx="1554480" cy="731520"/>
           </a:xfrm>
           <a:prstGeom prst="rect">
             <a:avLst/>
@@ -13464,20 +12988,91 @@
       </p:sp>
       <p:sp>
         <p:nvSpPr>
-          <p:cNvPr id="36" name="Rectangle 35"/>
+          <p:cNvPr id="24" name="TextBox 23"/>
+          <p:cNvSpPr txBox="1"/>
+          <p:nvPr/>
+        </p:nvSpPr>
+        <p:spPr>
+          <a:xfrm>
+            <a:off x="9692640" y="1737360"/>
+            <a:ext cx="1554480" cy="731520"/>
+          </a:xfrm>
+          <a:prstGeom prst="rect">
+            <a:avLst/>
+          </a:prstGeom>
+          <a:noFill/>
+        </p:spPr>
+        <p:txBody>
+          <a:bodyPr wrap="square">
+            <a:spAutoFit/>
+          </a:bodyPr>
+          <a:lstStyle/>
+          <a:p>
+            <a:pPr algn="ctr"/>
+            <a:r>
+              <a:rPr sz="1000" b="1" i="0">
+                <a:solidFill>
+                  <a:srgbClr val="FFFFFF"/>
+                </a:solidFill>
+                <a:latin typeface="Calibri"/>
+              </a:rPr>
+              <a:t>Save
+.wav</a:t>
+            </a:r>
+          </a:p>
+        </p:txBody>
+      </p:sp>
+      <p:sp>
+        <p:nvSpPr>
+          <p:cNvPr id="25" name="TextBox 24"/>
+          <p:cNvSpPr txBox="1"/>
+          <p:nvPr/>
+        </p:nvSpPr>
+        <p:spPr>
+          <a:xfrm>
+            <a:off x="457200" y="2834640"/>
+            <a:ext cx="5486400" cy="347472"/>
+          </a:xfrm>
+          <a:prstGeom prst="rect">
+            <a:avLst/>
+          </a:prstGeom>
+          <a:noFill/>
+        </p:spPr>
+        <p:txBody>
+          <a:bodyPr wrap="square">
+            <a:spAutoFit/>
+          </a:bodyPr>
+          <a:lstStyle/>
+          <a:p>
+            <a:pPr algn="l"/>
+            <a:r>
+              <a:rPr sz="1300" b="1" i="0">
+                <a:solidFill>
+                  <a:srgbClr val="7B2FFF"/>
+                </a:solidFill>
+                <a:latin typeface="Calibri"/>
+              </a:rPr>
+              <a:t>ML Pipeline</a:t>
+            </a:r>
+          </a:p>
+        </p:txBody>
+      </p:sp>
+      <p:sp>
+        <p:nvSpPr>
+          <p:cNvPr id="26" name="Rectangle 25"/>
           <p:cNvSpPr/>
           <p:nvPr/>
         </p:nvSpPr>
         <p:spPr>
           <a:xfrm>
-            <a:off x="8138160" y="2423160"/>
-            <a:ext cx="3657600" cy="91440"/>
+            <a:off x="457200" y="3246120"/>
+            <a:ext cx="1920240" cy="731520"/>
           </a:xfrm>
           <a:prstGeom prst="rect">
             <a:avLst/>
           </a:prstGeom>
           <a:solidFill>
-            <a:srgbClr val="00C896"/>
+            <a:srgbClr val="152B3E"/>
           </a:solidFill>
           <a:ln>
             <a:noFill/>
@@ -13508,14 +13103,395 @@
       </p:sp>
       <p:sp>
         <p:nvSpPr>
+          <p:cNvPr id="27" name="TextBox 26"/>
+          <p:cNvSpPr txBox="1"/>
+          <p:nvPr/>
+        </p:nvSpPr>
+        <p:spPr>
+          <a:xfrm>
+            <a:off x="457200" y="3246120"/>
+            <a:ext cx="1920240" cy="731520"/>
+          </a:xfrm>
+          <a:prstGeom prst="rect">
+            <a:avLst/>
+          </a:prstGeom>
+          <a:noFill/>
+        </p:spPr>
+        <p:txBody>
+          <a:bodyPr wrap="square">
+            <a:spAutoFit/>
+          </a:bodyPr>
+          <a:lstStyle/>
+          <a:p>
+            <a:pPr algn="ctr"/>
+            <a:r>
+              <a:rPr sz="1000" b="1" i="0">
+                <a:solidFill>
+                  <a:srgbClr val="FFFFFF"/>
+                </a:solidFill>
+                <a:latin typeface="Calibri"/>
+              </a:rPr>
+              <a:t>Load
+GTZAN</a:t>
+            </a:r>
+          </a:p>
+        </p:txBody>
+      </p:sp>
+      <p:sp>
+        <p:nvSpPr>
+          <p:cNvPr id="28" name="TextBox 27"/>
+          <p:cNvSpPr txBox="1"/>
+          <p:nvPr/>
+        </p:nvSpPr>
+        <p:spPr>
+          <a:xfrm>
+            <a:off x="2395728" y="3429000"/>
+            <a:ext cx="256032" cy="365760"/>
+          </a:xfrm>
+          <a:prstGeom prst="rect">
+            <a:avLst/>
+          </a:prstGeom>
+          <a:noFill/>
+        </p:spPr>
+        <p:txBody>
+          <a:bodyPr wrap="square">
+            <a:spAutoFit/>
+          </a:bodyPr>
+          <a:lstStyle/>
+          <a:p>
+            <a:pPr algn="l"/>
+            <a:r>
+              <a:rPr sz="1300" b="0" i="0">
+                <a:solidFill>
+                  <a:srgbClr val="7B2FFF"/>
+                </a:solidFill>
+                <a:latin typeface="Calibri"/>
+              </a:rPr>
+              <a:t>→</a:t>
+            </a:r>
+          </a:p>
+        </p:txBody>
+      </p:sp>
+      <p:sp>
+        <p:nvSpPr>
+          <p:cNvPr id="29" name="Rectangle 28"/>
+          <p:cNvSpPr/>
+          <p:nvPr/>
+        </p:nvSpPr>
+        <p:spPr>
+          <a:xfrm>
+            <a:off x="2670048" y="3246120"/>
+            <a:ext cx="1920240" cy="731520"/>
+          </a:xfrm>
+          <a:prstGeom prst="rect">
+            <a:avLst/>
+          </a:prstGeom>
+          <a:solidFill>
+            <a:srgbClr val="152B3E"/>
+          </a:solidFill>
+          <a:ln>
+            <a:noFill/>
+          </a:ln>
+        </p:spPr>
+        <p:style>
+          <a:lnRef idx="1">
+            <a:schemeClr val="accent1"/>
+          </a:lnRef>
+          <a:fillRef idx="3">
+            <a:schemeClr val="accent1"/>
+          </a:fillRef>
+          <a:effectRef idx="2">
+            <a:schemeClr val="accent1"/>
+          </a:effectRef>
+          <a:fontRef idx="minor">
+            <a:schemeClr val="lt1"/>
+          </a:fontRef>
+        </p:style>
+        <p:txBody>
+          <a:bodyPr rtlCol="0" anchor="ctr"/>
+          <a:lstStyle/>
+          <a:p>
+            <a:pPr algn="ctr"/>
+            <a:endParaRPr/>
+          </a:p>
+        </p:txBody>
+      </p:sp>
+      <p:sp>
+        <p:nvSpPr>
+          <p:cNvPr id="30" name="TextBox 29"/>
+          <p:cNvSpPr txBox="1"/>
+          <p:nvPr/>
+        </p:nvSpPr>
+        <p:spPr>
+          <a:xfrm>
+            <a:off x="2670048" y="3246120"/>
+            <a:ext cx="1920240" cy="731520"/>
+          </a:xfrm>
+          <a:prstGeom prst="rect">
+            <a:avLst/>
+          </a:prstGeom>
+          <a:noFill/>
+        </p:spPr>
+        <p:txBody>
+          <a:bodyPr wrap="square">
+            <a:spAutoFit/>
+          </a:bodyPr>
+          <a:lstStyle/>
+          <a:p>
+            <a:pPr algn="ctr"/>
+            <a:r>
+              <a:rPr sz="1000" b="1" i="0">
+                <a:solidFill>
+                  <a:srgbClr val="FFFFFF"/>
+                </a:solidFill>
+                <a:latin typeface="Calibri"/>
+              </a:rPr>
+              <a:t>Extract
+MFCC×40</a:t>
+            </a:r>
+          </a:p>
+        </p:txBody>
+      </p:sp>
+      <p:sp>
+        <p:nvSpPr>
+          <p:cNvPr id="31" name="TextBox 30"/>
+          <p:cNvSpPr txBox="1"/>
+          <p:nvPr/>
+        </p:nvSpPr>
+        <p:spPr>
+          <a:xfrm>
+            <a:off x="4608576" y="3429000"/>
+            <a:ext cx="256032" cy="365760"/>
+          </a:xfrm>
+          <a:prstGeom prst="rect">
+            <a:avLst/>
+          </a:prstGeom>
+          <a:noFill/>
+        </p:spPr>
+        <p:txBody>
+          <a:bodyPr wrap="square">
+            <a:spAutoFit/>
+          </a:bodyPr>
+          <a:lstStyle/>
+          <a:p>
+            <a:pPr algn="l"/>
+            <a:r>
+              <a:rPr sz="1300" b="0" i="0">
+                <a:solidFill>
+                  <a:srgbClr val="7B2FFF"/>
+                </a:solidFill>
+                <a:latin typeface="Calibri"/>
+              </a:rPr>
+              <a:t>→</a:t>
+            </a:r>
+          </a:p>
+        </p:txBody>
+      </p:sp>
+      <p:sp>
+        <p:nvSpPr>
+          <p:cNvPr id="32" name="Rectangle 31"/>
+          <p:cNvSpPr/>
+          <p:nvPr/>
+        </p:nvSpPr>
+        <p:spPr>
+          <a:xfrm>
+            <a:off x="4882896" y="3246120"/>
+            <a:ext cx="1920240" cy="731520"/>
+          </a:xfrm>
+          <a:prstGeom prst="rect">
+            <a:avLst/>
+          </a:prstGeom>
+          <a:solidFill>
+            <a:srgbClr val="152B3E"/>
+          </a:solidFill>
+          <a:ln>
+            <a:noFill/>
+          </a:ln>
+        </p:spPr>
+        <p:style>
+          <a:lnRef idx="1">
+            <a:schemeClr val="accent1"/>
+          </a:lnRef>
+          <a:fillRef idx="3">
+            <a:schemeClr val="accent1"/>
+          </a:fillRef>
+          <a:effectRef idx="2">
+            <a:schemeClr val="accent1"/>
+          </a:effectRef>
+          <a:fontRef idx="minor">
+            <a:schemeClr val="lt1"/>
+          </a:fontRef>
+        </p:style>
+        <p:txBody>
+          <a:bodyPr rtlCol="0" anchor="ctr"/>
+          <a:lstStyle/>
+          <a:p>
+            <a:pPr algn="ctr"/>
+            <a:endParaRPr/>
+          </a:p>
+        </p:txBody>
+      </p:sp>
+      <p:sp>
+        <p:nvSpPr>
+          <p:cNvPr id="33" name="TextBox 32"/>
+          <p:cNvSpPr txBox="1"/>
+          <p:nvPr/>
+        </p:nvSpPr>
+        <p:spPr>
+          <a:xfrm>
+            <a:off x="4882896" y="3246120"/>
+            <a:ext cx="1920240" cy="731520"/>
+          </a:xfrm>
+          <a:prstGeom prst="rect">
+            <a:avLst/>
+          </a:prstGeom>
+          <a:noFill/>
+        </p:spPr>
+        <p:txBody>
+          <a:bodyPr wrap="square">
+            <a:spAutoFit/>
+          </a:bodyPr>
+          <a:lstStyle/>
+          <a:p>
+            <a:pPr algn="ctr"/>
+            <a:r>
+              <a:rPr sz="1000" b="1" i="0">
+                <a:solidFill>
+                  <a:srgbClr val="FFFFFF"/>
+                </a:solidFill>
+                <a:latin typeface="Calibri"/>
+              </a:rPr>
+              <a:t>StandardScaler
+Normalize</a:t>
+            </a:r>
+          </a:p>
+        </p:txBody>
+      </p:sp>
+      <p:sp>
+        <p:nvSpPr>
+          <p:cNvPr id="34" name="TextBox 33"/>
+          <p:cNvSpPr txBox="1"/>
+          <p:nvPr/>
+        </p:nvSpPr>
+        <p:spPr>
+          <a:xfrm>
+            <a:off x="6821424" y="3429000"/>
+            <a:ext cx="256032" cy="365760"/>
+          </a:xfrm>
+          <a:prstGeom prst="rect">
+            <a:avLst/>
+          </a:prstGeom>
+          <a:noFill/>
+        </p:spPr>
+        <p:txBody>
+          <a:bodyPr wrap="square">
+            <a:spAutoFit/>
+          </a:bodyPr>
+          <a:lstStyle/>
+          <a:p>
+            <a:pPr algn="l"/>
+            <a:r>
+              <a:rPr sz="1300" b="0" i="0">
+                <a:solidFill>
+                  <a:srgbClr val="7B2FFF"/>
+                </a:solidFill>
+                <a:latin typeface="Calibri"/>
+              </a:rPr>
+              <a:t>→</a:t>
+            </a:r>
+          </a:p>
+        </p:txBody>
+      </p:sp>
+      <p:sp>
+        <p:nvSpPr>
+          <p:cNvPr id="35" name="Rectangle 34"/>
+          <p:cNvSpPr/>
+          <p:nvPr/>
+        </p:nvSpPr>
+        <p:spPr>
+          <a:xfrm>
+            <a:off x="7095744" y="3246120"/>
+            <a:ext cx="1920240" cy="731520"/>
+          </a:xfrm>
+          <a:prstGeom prst="rect">
+            <a:avLst/>
+          </a:prstGeom>
+          <a:solidFill>
+            <a:srgbClr val="152B3E"/>
+          </a:solidFill>
+          <a:ln>
+            <a:noFill/>
+          </a:ln>
+        </p:spPr>
+        <p:style>
+          <a:lnRef idx="1">
+            <a:schemeClr val="accent1"/>
+          </a:lnRef>
+          <a:fillRef idx="3">
+            <a:schemeClr val="accent1"/>
+          </a:fillRef>
+          <a:effectRef idx="2">
+            <a:schemeClr val="accent1"/>
+          </a:effectRef>
+          <a:fontRef idx="minor">
+            <a:schemeClr val="lt1"/>
+          </a:fontRef>
+        </p:style>
+        <p:txBody>
+          <a:bodyPr rtlCol="0" anchor="ctr"/>
+          <a:lstStyle/>
+          <a:p>
+            <a:pPr algn="ctr"/>
+            <a:endParaRPr/>
+          </a:p>
+        </p:txBody>
+      </p:sp>
+      <p:sp>
+        <p:nvSpPr>
+          <p:cNvPr id="36" name="TextBox 35"/>
+          <p:cNvSpPr txBox="1"/>
+          <p:nvPr/>
+        </p:nvSpPr>
+        <p:spPr>
+          <a:xfrm>
+            <a:off x="7095744" y="3246120"/>
+            <a:ext cx="1920240" cy="731520"/>
+          </a:xfrm>
+          <a:prstGeom prst="rect">
+            <a:avLst/>
+          </a:prstGeom>
+          <a:noFill/>
+        </p:spPr>
+        <p:txBody>
+          <a:bodyPr wrap="square">
+            <a:spAutoFit/>
+          </a:bodyPr>
+          <a:lstStyle/>
+          <a:p>
+            <a:pPr algn="ctr"/>
+            <a:r>
+              <a:rPr sz="1000" b="1" i="0">
+                <a:solidFill>
+                  <a:srgbClr val="FFFFFF"/>
+                </a:solidFill>
+                <a:latin typeface="Calibri"/>
+              </a:rPr>
+              <a:t>Train
+SVM/RF</a:t>
+            </a:r>
+          </a:p>
+        </p:txBody>
+      </p:sp>
+      <p:sp>
+        <p:nvSpPr>
           <p:cNvPr id="37" name="TextBox 36"/>
           <p:cNvSpPr txBox="1"/>
           <p:nvPr/>
         </p:nvSpPr>
         <p:spPr>
           <a:xfrm>
-            <a:off x="8247888" y="2542032"/>
-            <a:ext cx="3383280" cy="384048"/>
+            <a:off x="9034272" y="3429000"/>
+            <a:ext cx="256032" cy="365760"/>
           </a:xfrm>
           <a:prstGeom prst="rect">
             <a:avLst/>
@@ -13530,27 +13506,107 @@
           <a:p>
             <a:pPr algn="l"/>
             <a:r>
-              <a:rPr sz="1400" b="1" i="0">
-                <a:solidFill>
-                  <a:srgbClr val="00C896"/>
-                </a:solidFill>
-                <a:latin typeface="Calibri"/>
-              </a:rPr>
-              <a:t>Random Forest</a:t>
-            </a:r>
-          </a:p>
-        </p:txBody>
-      </p:sp>
-      <p:sp>
-        <p:nvSpPr>
-          <p:cNvPr id="38" name="TextBox 37"/>
-          <p:cNvSpPr txBox="1"/>
-          <p:nvPr/>
-        </p:nvSpPr>
-        <p:spPr>
-          <a:xfrm>
-            <a:off x="8247888" y="2971800"/>
-            <a:ext cx="3383280" cy="1920240"/>
+              <a:rPr sz="1300" b="0" i="0">
+                <a:solidFill>
+                  <a:srgbClr val="7B2FFF"/>
+                </a:solidFill>
+                <a:latin typeface="Calibri"/>
+              </a:rPr>
+              <a:t>→</a:t>
+            </a:r>
+          </a:p>
+        </p:txBody>
+      </p:sp>
+      <p:sp>
+        <p:nvSpPr>
+          <p:cNvPr id="38" name="Rectangle 37"/>
+          <p:cNvSpPr/>
+          <p:nvPr/>
+        </p:nvSpPr>
+        <p:spPr>
+          <a:xfrm>
+            <a:off x="9308592" y="3246120"/>
+            <a:ext cx="1920240" cy="731520"/>
+          </a:xfrm>
+          <a:prstGeom prst="rect">
+            <a:avLst/>
+          </a:prstGeom>
+          <a:solidFill>
+            <a:srgbClr val="152B3E"/>
+          </a:solidFill>
+          <a:ln>
+            <a:noFill/>
+          </a:ln>
+        </p:spPr>
+        <p:style>
+          <a:lnRef idx="1">
+            <a:schemeClr val="accent1"/>
+          </a:lnRef>
+          <a:fillRef idx="3">
+            <a:schemeClr val="accent1"/>
+          </a:fillRef>
+          <a:effectRef idx="2">
+            <a:schemeClr val="accent1"/>
+          </a:effectRef>
+          <a:fontRef idx="minor">
+            <a:schemeClr val="lt1"/>
+          </a:fontRef>
+        </p:style>
+        <p:txBody>
+          <a:bodyPr rtlCol="0" anchor="ctr"/>
+          <a:lstStyle/>
+          <a:p>
+            <a:pPr algn="ctr"/>
+            <a:endParaRPr/>
+          </a:p>
+        </p:txBody>
+      </p:sp>
+      <p:sp>
+        <p:nvSpPr>
+          <p:cNvPr id="39" name="TextBox 38"/>
+          <p:cNvSpPr txBox="1"/>
+          <p:nvPr/>
+        </p:nvSpPr>
+        <p:spPr>
+          <a:xfrm>
+            <a:off x="9308592" y="3246120"/>
+            <a:ext cx="1920240" cy="731520"/>
+          </a:xfrm>
+          <a:prstGeom prst="rect">
+            <a:avLst/>
+          </a:prstGeom>
+          <a:noFill/>
+        </p:spPr>
+        <p:txBody>
+          <a:bodyPr wrap="square">
+            <a:spAutoFit/>
+          </a:bodyPr>
+          <a:lstStyle/>
+          <a:p>
+            <a:pPr algn="ctr"/>
+            <a:r>
+              <a:rPr sz="1000" b="1" i="0">
+                <a:solidFill>
+                  <a:srgbClr val="FFFFFF"/>
+                </a:solidFill>
+                <a:latin typeface="Calibri"/>
+              </a:rPr>
+              <a:t>Evaluate
+Accuracy</a:t>
+            </a:r>
+          </a:p>
+        </p:txBody>
+      </p:sp>
+      <p:sp>
+        <p:nvSpPr>
+          <p:cNvPr id="40" name="TextBox 39"/>
+          <p:cNvSpPr txBox="1"/>
+          <p:nvPr/>
+        </p:nvSpPr>
+        <p:spPr>
+          <a:xfrm>
+            <a:off x="457200" y="4206240"/>
+            <a:ext cx="5486400" cy="365760"/>
           </a:xfrm>
           <a:prstGeom prst="rect">
             <a:avLst/>
@@ -13565,57 +13621,252 @@
           <a:p>
             <a:pPr algn="l"/>
             <a:r>
+              <a:rPr sz="1500" b="1" i="0">
+                <a:solidFill>
+                  <a:srgbClr val="FFFFFF"/>
+                </a:solidFill>
+                <a:latin typeface="Calibri"/>
+              </a:rPr>
+              <a:t>Phương Pháp Test</a:t>
+            </a:r>
+          </a:p>
+        </p:txBody>
+      </p:sp>
+      <p:sp>
+        <p:nvSpPr>
+          <p:cNvPr id="41" name="Rectangle 40"/>
+          <p:cNvSpPr/>
+          <p:nvPr/>
+        </p:nvSpPr>
+        <p:spPr>
+          <a:xfrm>
+            <a:off x="457200" y="4663440"/>
+            <a:ext cx="5394960" cy="1737360"/>
+          </a:xfrm>
+          <a:prstGeom prst="rect">
+            <a:avLst/>
+          </a:prstGeom>
+          <a:solidFill>
+            <a:srgbClr val="152B3E"/>
+          </a:solidFill>
+          <a:ln>
+            <a:noFill/>
+          </a:ln>
+        </p:spPr>
+        <p:style>
+          <a:lnRef idx="1">
+            <a:schemeClr val="accent1"/>
+          </a:lnRef>
+          <a:fillRef idx="3">
+            <a:schemeClr val="accent1"/>
+          </a:fillRef>
+          <a:effectRef idx="2">
+            <a:schemeClr val="accent1"/>
+          </a:effectRef>
+          <a:fontRef idx="minor">
+            <a:schemeClr val="lt1"/>
+          </a:fontRef>
+        </p:style>
+        <p:txBody>
+          <a:bodyPr rtlCol="0" anchor="ctr"/>
+          <a:lstStyle/>
+          <a:p>
+            <a:pPr algn="ctr"/>
+            <a:endParaRPr/>
+          </a:p>
+        </p:txBody>
+      </p:sp>
+      <p:sp>
+        <p:nvSpPr>
+          <p:cNvPr id="42" name="TextBox 41"/>
+          <p:cNvSpPr txBox="1"/>
+          <p:nvPr/>
+        </p:nvSpPr>
+        <p:spPr>
+          <a:xfrm>
+            <a:off x="594360" y="4736592"/>
+            <a:ext cx="5029200" cy="347472"/>
+          </a:xfrm>
+          <a:prstGeom prst="rect">
+            <a:avLst/>
+          </a:prstGeom>
+          <a:noFill/>
+        </p:spPr>
+        <p:txBody>
+          <a:bodyPr wrap="square">
+            <a:spAutoFit/>
+          </a:bodyPr>
+          <a:lstStyle/>
+          <a:p>
+            <a:pPr algn="l"/>
+            <a:r>
+              <a:rPr sz="1300" b="1" i="0">
+                <a:solidFill>
+                  <a:srgbClr val="00D4FF"/>
+                </a:solidFill>
+                <a:latin typeface="Calibri"/>
+              </a:rPr>
+              <a:t>Equalizer</a:t>
+            </a:r>
+          </a:p>
+        </p:txBody>
+      </p:sp>
+      <p:sp>
+        <p:nvSpPr>
+          <p:cNvPr id="43" name="TextBox 42"/>
+          <p:cNvSpPr txBox="1"/>
+          <p:nvPr/>
+        </p:nvSpPr>
+        <p:spPr>
+          <a:xfrm>
+            <a:off x="594360" y="5120640"/>
+            <a:ext cx="5029200" cy="1188720"/>
+          </a:xfrm>
+          <a:prstGeom prst="rect">
+            <a:avLst/>
+          </a:prstGeom>
+          <a:noFill/>
+        </p:spPr>
+        <p:txBody>
+          <a:bodyPr wrap="square">
+            <a:spAutoFit/>
+          </a:bodyPr>
+          <a:lstStyle/>
+          <a:p>
+            <a:pPr algn="l"/>
+            <a:r>
               <a:rPr sz="1200" b="0" i="0">
                 <a:solidFill>
                   <a:srgbClr val="FFFFFF"/>
                 </a:solidFill>
                 <a:latin typeface="Calibri"/>
               </a:rPr>
-              <a:t>Ensemble of Decision Trees
-Majority voting → low overfitting
-Accuracy: 51.6%</a:t>
-            </a:r>
-          </a:p>
-        </p:txBody>
-      </p:sp>
-      <p:sp>
-        <p:nvSpPr>
-          <p:cNvPr id="39" name="TextBox 38"/>
-          <p:cNvSpPr txBox="1"/>
-          <p:nvPr/>
-        </p:nvSpPr>
-        <p:spPr>
-          <a:xfrm>
-            <a:off x="457200" y="5212080"/>
-            <a:ext cx="10972800" cy="457200"/>
-          </a:xfrm>
-          <a:prstGeom prst="rect">
-            <a:avLst/>
-          </a:prstGeom>
-          <a:noFill/>
-        </p:spPr>
-        <p:txBody>
-          <a:bodyPr wrap="square">
-            <a:spAutoFit/>
-          </a:bodyPr>
+              <a:t>• Sine đơn tần (per band)
+• White noise (all bands)
+• File nhạc thực</a:t>
+            </a:r>
+          </a:p>
+        </p:txBody>
+      </p:sp>
+      <p:sp>
+        <p:nvSpPr>
+          <p:cNvPr id="44" name="Rectangle 43"/>
+          <p:cNvSpPr/>
+          <p:nvPr/>
+        </p:nvSpPr>
+        <p:spPr>
+          <a:xfrm>
+            <a:off x="6126480" y="4663440"/>
+            <a:ext cx="5394960" cy="1737360"/>
+          </a:xfrm>
+          <a:prstGeom prst="rect">
+            <a:avLst/>
+          </a:prstGeom>
+          <a:solidFill>
+            <a:srgbClr val="152B3E"/>
+          </a:solidFill>
+          <a:ln>
+            <a:noFill/>
+          </a:ln>
+        </p:spPr>
+        <p:style>
+          <a:lnRef idx="1">
+            <a:schemeClr val="accent1"/>
+          </a:lnRef>
+          <a:fillRef idx="3">
+            <a:schemeClr val="accent1"/>
+          </a:fillRef>
+          <a:effectRef idx="2">
+            <a:schemeClr val="accent1"/>
+          </a:effectRef>
+          <a:fontRef idx="minor">
+            <a:schemeClr val="lt1"/>
+          </a:fontRef>
+        </p:style>
+        <p:txBody>
+          <a:bodyPr rtlCol="0" anchor="ctr"/>
           <a:lstStyle/>
           <a:p>
             <a:pPr algn="ctr"/>
-            <a:r>
-              <a:rPr sz="1200" b="0" i="1">
-                <a:solidFill>
-                  <a:srgbClr val="B0C8D8"/>
-                </a:solidFill>
-                <a:latin typeface="Calibri"/>
-              </a:rPr>
-              <a:t>Pipeline:  Audio  →  Feature Extraction  →  StandardScaler  →  Model  →  Prediction</a:t>
-            </a:r>
-          </a:p>
-        </p:txBody>
-      </p:sp>
-      <p:sp>
-        <p:nvSpPr>
-          <p:cNvPr id="40" name="TextBox 39"/>
+            <a:endParaRPr/>
+          </a:p>
+        </p:txBody>
+      </p:sp>
+      <p:sp>
+        <p:nvSpPr>
+          <p:cNvPr id="45" name="TextBox 44"/>
+          <p:cNvSpPr txBox="1"/>
+          <p:nvPr/>
+        </p:nvSpPr>
+        <p:spPr>
+          <a:xfrm>
+            <a:off x="6263640" y="4736592"/>
+            <a:ext cx="5029200" cy="347472"/>
+          </a:xfrm>
+          <a:prstGeom prst="rect">
+            <a:avLst/>
+          </a:prstGeom>
+          <a:noFill/>
+        </p:spPr>
+        <p:txBody>
+          <a:bodyPr wrap="square">
+            <a:spAutoFit/>
+          </a:bodyPr>
+          <a:lstStyle/>
+          <a:p>
+            <a:pPr algn="l"/>
+            <a:r>
+              <a:rPr sz="1300" b="1" i="0">
+                <a:solidFill>
+                  <a:srgbClr val="7B2FFF"/>
+                </a:solidFill>
+                <a:latin typeface="Calibri"/>
+              </a:rPr>
+              <a:t>ML Model</a:t>
+            </a:r>
+          </a:p>
+        </p:txBody>
+      </p:sp>
+      <p:sp>
+        <p:nvSpPr>
+          <p:cNvPr id="46" name="TextBox 45"/>
+          <p:cNvSpPr txBox="1"/>
+          <p:nvPr/>
+        </p:nvSpPr>
+        <p:spPr>
+          <a:xfrm>
+            <a:off x="6263640" y="5120640"/>
+            <a:ext cx="5029200" cy="1188720"/>
+          </a:xfrm>
+          <a:prstGeom prst="rect">
+            <a:avLst/>
+          </a:prstGeom>
+          <a:noFill/>
+        </p:spPr>
+        <p:txBody>
+          <a:bodyPr wrap="square">
+            <a:spAutoFit/>
+          </a:bodyPr>
+          <a:lstStyle/>
+          <a:p>
+            <a:pPr algn="l"/>
+            <a:r>
+              <a:rPr sz="1200" b="0" i="0">
+                <a:solidFill>
+                  <a:srgbClr val="FFFFFF"/>
+                </a:solidFill>
+                <a:latin typeface="Calibri"/>
+              </a:rPr>
+              <a:t>• Tập test riêng biệt
+• Accuracy/Precision/F1
+• Confusion Matrix</a:t>
+            </a:r>
+          </a:p>
+        </p:txBody>
+      </p:sp>
+      <p:sp>
+        <p:nvSpPr>
+          <p:cNvPr id="47" name="TextBox 46"/>
           <p:cNvSpPr txBox="1"/>
           <p:nvPr/>
         </p:nvSpPr>
@@ -13643,7 +13894,7 @@
                 </a:solidFill>
                 <a:latin typeface="Calibri"/>
               </a:rPr>
-              <a:t>6 / 13</a:t>
+              <a:t>7 / 13</a:t>
             </a:r>
           </a:p>
         </p:txBody>
@@ -13799,7 +14050,7 @@
                 </a:solidFill>
                 <a:latin typeface="Calibri"/>
               </a:rPr>
-              <a:t>03  THIẾT KẾ</a:t>
+              <a:t>04  MACHINE LEARNING</a:t>
             </a:r>
           </a:p>
         </p:txBody>
@@ -13813,7 +14064,7 @@
         <p:spPr>
           <a:xfrm>
             <a:off x="457200" y="548640"/>
-            <a:ext cx="9144000" cy="502920"/>
+            <a:ext cx="10058400" cy="502920"/>
           </a:xfrm>
           <a:prstGeom prst="rect">
             <a:avLst/>
@@ -13834,7 +14085,7 @@
                 </a:solidFill>
                 <a:latin typeface="Calibri"/>
               </a:rPr>
-              <a:t>Sơ Đồ Hệ Thống</a:t>
+              <a:t>MFCC · SVM · Random Forest</a:t>
             </a:r>
           </a:p>
         </p:txBody>
@@ -13848,7 +14099,7 @@
         <p:spPr>
           <a:xfrm>
             <a:off x="457200" y="1097280"/>
-            <a:ext cx="3657600" cy="36576"/>
+            <a:ext cx="5303520" cy="36576"/>
           </a:xfrm>
           <a:prstGeom prst="rect">
             <a:avLst/>
@@ -13885,14 +14136,93 @@
       </p:sp>
       <p:sp>
         <p:nvSpPr>
-          <p:cNvPr id="7" name="TextBox 6"/>
-          <p:cNvSpPr txBox="1"/>
-          <p:nvPr/>
-        </p:nvSpPr>
-        <p:spPr>
-          <a:xfrm>
-            <a:off x="457200" y="1325880"/>
-            <a:ext cx="5486400" cy="347472"/>
+          <p:cNvPr id="7" name="Rectangle 6"/>
+          <p:cNvSpPr/>
+          <p:nvPr/>
+        </p:nvSpPr>
+        <p:spPr>
+          <a:xfrm>
+            <a:off x="365760" y="1417320"/>
+            <a:ext cx="1280160" cy="685800"/>
+          </a:xfrm>
+          <a:prstGeom prst="rect">
+            <a:avLst/>
+          </a:prstGeom>
+          <a:solidFill>
+            <a:srgbClr val="00D4FF"/>
+          </a:solidFill>
+          <a:ln>
+            <a:noFill/>
+          </a:ln>
+        </p:spPr>
+        <p:style>
+          <a:lnRef idx="1">
+            <a:schemeClr val="accent1"/>
+          </a:lnRef>
+          <a:fillRef idx="3">
+            <a:schemeClr val="accent1"/>
+          </a:fillRef>
+          <a:effectRef idx="2">
+            <a:schemeClr val="accent1"/>
+          </a:effectRef>
+          <a:fontRef idx="minor">
+            <a:schemeClr val="lt1"/>
+          </a:fontRef>
+        </p:style>
+        <p:txBody>
+          <a:bodyPr rtlCol="0" anchor="ctr"/>
+          <a:lstStyle/>
+          <a:p>
+            <a:pPr algn="ctr"/>
+            <a:endParaRPr/>
+          </a:p>
+        </p:txBody>
+      </p:sp>
+      <p:sp>
+        <p:nvSpPr>
+          <p:cNvPr id="8" name="TextBox 7"/>
+          <p:cNvSpPr txBox="1"/>
+          <p:nvPr/>
+        </p:nvSpPr>
+        <p:spPr>
+          <a:xfrm>
+            <a:off x="365760" y="1417320"/>
+            <a:ext cx="1280160" cy="685800"/>
+          </a:xfrm>
+          <a:prstGeom prst="rect">
+            <a:avLst/>
+          </a:prstGeom>
+          <a:noFill/>
+        </p:spPr>
+        <p:txBody>
+          <a:bodyPr wrap="square">
+            <a:spAutoFit/>
+          </a:bodyPr>
+          <a:lstStyle/>
+          <a:p>
+            <a:pPr algn="ctr"/>
+            <a:r>
+              <a:rPr sz="1050" b="1" i="0">
+                <a:solidFill>
+                  <a:srgbClr val="0D1B2A"/>
+                </a:solidFill>
+                <a:latin typeface="Calibri"/>
+              </a:rPr>
+              <a:t>Audio</a:t>
+            </a:r>
+          </a:p>
+        </p:txBody>
+      </p:sp>
+      <p:sp>
+        <p:nvSpPr>
+          <p:cNvPr id="9" name="TextBox 8"/>
+          <p:cNvSpPr txBox="1"/>
+          <p:nvPr/>
+        </p:nvSpPr>
+        <p:spPr>
+          <a:xfrm>
+            <a:off x="1682496" y="1600200"/>
+            <a:ext cx="228600" cy="320040"/>
           </a:xfrm>
           <a:prstGeom prst="rect">
             <a:avLst/>
@@ -13907,27 +14237,27 @@
           <a:p>
             <a:pPr algn="l"/>
             <a:r>
-              <a:rPr sz="1300" b="1" i="0">
+              <a:rPr sz="1300" b="0" i="0">
                 <a:solidFill>
                   <a:srgbClr val="00D4FF"/>
                 </a:solidFill>
                 <a:latin typeface="Calibri"/>
               </a:rPr>
-              <a:t>Equalizer Pipeline</a:t>
-            </a:r>
-          </a:p>
-        </p:txBody>
-      </p:sp>
-      <p:sp>
-        <p:nvSpPr>
-          <p:cNvPr id="8" name="Rectangle 7"/>
+              <a:t>→</a:t>
+            </a:r>
+          </a:p>
+        </p:txBody>
+      </p:sp>
+      <p:sp>
+        <p:nvSpPr>
+          <p:cNvPr id="10" name="Rectangle 9"/>
           <p:cNvSpPr/>
           <p:nvPr/>
         </p:nvSpPr>
         <p:spPr>
           <a:xfrm>
-            <a:off x="457200" y="1737360"/>
-            <a:ext cx="1554480" cy="731520"/>
+            <a:off x="2011680" y="1417320"/>
+            <a:ext cx="1280160" cy="685800"/>
           </a:xfrm>
           <a:prstGeom prst="rect">
             <a:avLst/>
@@ -13964,14 +14294,14 @@
       </p:sp>
       <p:sp>
         <p:nvSpPr>
-          <p:cNvPr id="9" name="TextBox 8"/>
-          <p:cNvSpPr txBox="1"/>
-          <p:nvPr/>
-        </p:nvSpPr>
-        <p:spPr>
-          <a:xfrm>
-            <a:off x="457200" y="1737360"/>
-            <a:ext cx="1554480" cy="731520"/>
+          <p:cNvPr id="11" name="TextBox 10"/>
+          <p:cNvSpPr txBox="1"/>
+          <p:nvPr/>
+        </p:nvSpPr>
+        <p:spPr>
+          <a:xfrm>
+            <a:off x="2011680" y="1417320"/>
+            <a:ext cx="1280160" cy="685800"/>
           </a:xfrm>
           <a:prstGeom prst="rect">
             <a:avLst/>
@@ -13986,28 +14316,27 @@
           <a:p>
             <a:pPr algn="ctr"/>
             <a:r>
-              <a:rPr sz="1000" b="1" i="0">
+              <a:rPr sz="1050" b="1" i="0">
                 <a:solidFill>
                   <a:srgbClr val="FFFFFF"/>
                 </a:solidFill>
                 <a:latin typeface="Calibri"/>
               </a:rPr>
-              <a:t>Load
-.wav</a:t>
-            </a:r>
-          </a:p>
-        </p:txBody>
-      </p:sp>
-      <p:sp>
-        <p:nvSpPr>
-          <p:cNvPr id="10" name="TextBox 9"/>
-          <p:cNvSpPr txBox="1"/>
-          <p:nvPr/>
-        </p:nvSpPr>
-        <p:spPr>
-          <a:xfrm>
-            <a:off x="2029968" y="1920240"/>
-            <a:ext cx="256032" cy="365760"/>
+              <a:t>FFT</a:t>
+            </a:r>
+          </a:p>
+        </p:txBody>
+      </p:sp>
+      <p:sp>
+        <p:nvSpPr>
+          <p:cNvPr id="12" name="TextBox 11"/>
+          <p:cNvSpPr txBox="1"/>
+          <p:nvPr/>
+        </p:nvSpPr>
+        <p:spPr>
+          <a:xfrm>
+            <a:off x="3328416" y="1600200"/>
+            <a:ext cx="228600" cy="320040"/>
           </a:xfrm>
           <a:prstGeom prst="rect">
             <a:avLst/>
@@ -14035,14 +14364,14 @@
       </p:sp>
       <p:sp>
         <p:nvSpPr>
-          <p:cNvPr id="11" name="Rectangle 10"/>
+          <p:cNvPr id="13" name="Rectangle 12"/>
           <p:cNvSpPr/>
           <p:nvPr/>
         </p:nvSpPr>
         <p:spPr>
           <a:xfrm>
-            <a:off x="2304288" y="1737360"/>
-            <a:ext cx="1554480" cy="731520"/>
+            <a:off x="3657600" y="1417320"/>
+            <a:ext cx="1280160" cy="685800"/>
           </a:xfrm>
           <a:prstGeom prst="rect">
             <a:avLst/>
@@ -14079,14 +14408,14 @@
       </p:sp>
       <p:sp>
         <p:nvSpPr>
-          <p:cNvPr id="12" name="TextBox 11"/>
-          <p:cNvSpPr txBox="1"/>
-          <p:nvPr/>
-        </p:nvSpPr>
-        <p:spPr>
-          <a:xfrm>
-            <a:off x="2304288" y="1737360"/>
-            <a:ext cx="1554480" cy="731520"/>
+          <p:cNvPr id="14" name="TextBox 13"/>
+          <p:cNvSpPr txBox="1"/>
+          <p:nvPr/>
+        </p:nvSpPr>
+        <p:spPr>
+          <a:xfrm>
+            <a:off x="3657600" y="1417320"/>
+            <a:ext cx="1280160" cy="685800"/>
           </a:xfrm>
           <a:prstGeom prst="rect">
             <a:avLst/>
@@ -14101,28 +14430,28 @@
           <a:p>
             <a:pPr algn="ctr"/>
             <a:r>
-              <a:rPr sz="1000" b="1" i="0">
+              <a:rPr sz="1050" b="1" i="0">
                 <a:solidFill>
                   <a:srgbClr val="FFFFFF"/>
                 </a:solidFill>
                 <a:latin typeface="Calibri"/>
               </a:rPr>
-              <a:t>Filter Bank
-(10 FIR)</a:t>
-            </a:r>
-          </a:p>
-        </p:txBody>
-      </p:sp>
-      <p:sp>
-        <p:nvSpPr>
-          <p:cNvPr id="13" name="TextBox 12"/>
-          <p:cNvSpPr txBox="1"/>
-          <p:nvPr/>
-        </p:nvSpPr>
-        <p:spPr>
-          <a:xfrm>
-            <a:off x="3877056" y="1920240"/>
-            <a:ext cx="256032" cy="365760"/>
+              <a:t>Mel
+Filterbank</a:t>
+            </a:r>
+          </a:p>
+        </p:txBody>
+      </p:sp>
+      <p:sp>
+        <p:nvSpPr>
+          <p:cNvPr id="15" name="TextBox 14"/>
+          <p:cNvSpPr txBox="1"/>
+          <p:nvPr/>
+        </p:nvSpPr>
+        <p:spPr>
+          <a:xfrm>
+            <a:off x="4974336" y="1600200"/>
+            <a:ext cx="228600" cy="320040"/>
           </a:xfrm>
           <a:prstGeom prst="rect">
             <a:avLst/>
@@ -14150,14 +14479,14 @@
       </p:sp>
       <p:sp>
         <p:nvSpPr>
-          <p:cNvPr id="14" name="Rectangle 13"/>
+          <p:cNvPr id="16" name="Rectangle 15"/>
           <p:cNvSpPr/>
           <p:nvPr/>
         </p:nvSpPr>
         <p:spPr>
           <a:xfrm>
-            <a:off x="4151376" y="1737360"/>
-            <a:ext cx="1554480" cy="731520"/>
+            <a:off x="5303520" y="1417320"/>
+            <a:ext cx="1280160" cy="685800"/>
           </a:xfrm>
           <a:prstGeom prst="rect">
             <a:avLst/>
@@ -14194,14 +14523,14 @@
       </p:sp>
       <p:sp>
         <p:nvSpPr>
-          <p:cNvPr id="15" name="TextBox 14"/>
-          <p:cNvSpPr txBox="1"/>
-          <p:nvPr/>
-        </p:nvSpPr>
-        <p:spPr>
-          <a:xfrm>
-            <a:off x="4151376" y="1737360"/>
-            <a:ext cx="1554480" cy="731520"/>
+          <p:cNvPr id="17" name="TextBox 16"/>
+          <p:cNvSpPr txBox="1"/>
+          <p:nvPr/>
+        </p:nvSpPr>
+        <p:spPr>
+          <a:xfrm>
+            <a:off x="5303520" y="1417320"/>
+            <a:ext cx="1280160" cy="685800"/>
           </a:xfrm>
           <a:prstGeom prst="rect">
             <a:avLst/>
@@ -14216,28 +14545,27 @@
           <a:p>
             <a:pPr algn="ctr"/>
             <a:r>
-              <a:rPr sz="1000" b="1" i="0">
+              <a:rPr sz="1050" b="1" i="0">
                 <a:solidFill>
                   <a:srgbClr val="FFFFFF"/>
                 </a:solidFill>
                 <a:latin typeface="Calibri"/>
               </a:rPr>
-              <a:t>Apply Gain
-(±12 dB)</a:t>
-            </a:r>
-          </a:p>
-        </p:txBody>
-      </p:sp>
-      <p:sp>
-        <p:nvSpPr>
-          <p:cNvPr id="16" name="TextBox 15"/>
-          <p:cNvSpPr txBox="1"/>
-          <p:nvPr/>
-        </p:nvSpPr>
-        <p:spPr>
-          <a:xfrm>
-            <a:off x="5724144" y="1920240"/>
-            <a:ext cx="256032" cy="365760"/>
+              <a:t>log + DCT</a:t>
+            </a:r>
+          </a:p>
+        </p:txBody>
+      </p:sp>
+      <p:sp>
+        <p:nvSpPr>
+          <p:cNvPr id="18" name="TextBox 17"/>
+          <p:cNvSpPr txBox="1"/>
+          <p:nvPr/>
+        </p:nvSpPr>
+        <p:spPr>
+          <a:xfrm>
+            <a:off x="6620256" y="1600200"/>
+            <a:ext cx="228600" cy="320040"/>
           </a:xfrm>
           <a:prstGeom prst="rect">
             <a:avLst/>
@@ -14265,14 +14593,323 @@
       </p:sp>
       <p:sp>
         <p:nvSpPr>
-          <p:cNvPr id="17" name="Rectangle 16"/>
+          <p:cNvPr id="19" name="Rectangle 18"/>
           <p:cNvSpPr/>
           <p:nvPr/>
         </p:nvSpPr>
         <p:spPr>
           <a:xfrm>
-            <a:off x="5998464" y="1737360"/>
-            <a:ext cx="1554480" cy="731520"/>
+            <a:off x="6949440" y="1417320"/>
+            <a:ext cx="1280160" cy="685800"/>
+          </a:xfrm>
+          <a:prstGeom prst="rect">
+            <a:avLst/>
+          </a:prstGeom>
+          <a:solidFill>
+            <a:srgbClr val="00D4FF"/>
+          </a:solidFill>
+          <a:ln>
+            <a:noFill/>
+          </a:ln>
+        </p:spPr>
+        <p:style>
+          <a:lnRef idx="1">
+            <a:schemeClr val="accent1"/>
+          </a:lnRef>
+          <a:fillRef idx="3">
+            <a:schemeClr val="accent1"/>
+          </a:fillRef>
+          <a:effectRef idx="2">
+            <a:schemeClr val="accent1"/>
+          </a:effectRef>
+          <a:fontRef idx="minor">
+            <a:schemeClr val="lt1"/>
+          </a:fontRef>
+        </p:style>
+        <p:txBody>
+          <a:bodyPr rtlCol="0" anchor="ctr"/>
+          <a:lstStyle/>
+          <a:p>
+            <a:pPr algn="ctr"/>
+            <a:endParaRPr/>
+          </a:p>
+        </p:txBody>
+      </p:sp>
+      <p:sp>
+        <p:nvSpPr>
+          <p:cNvPr id="20" name="TextBox 19"/>
+          <p:cNvSpPr txBox="1"/>
+          <p:nvPr/>
+        </p:nvSpPr>
+        <p:spPr>
+          <a:xfrm>
+            <a:off x="6949440" y="1417320"/>
+            <a:ext cx="1280160" cy="685800"/>
+          </a:xfrm>
+          <a:prstGeom prst="rect">
+            <a:avLst/>
+          </a:prstGeom>
+          <a:noFill/>
+        </p:spPr>
+        <p:txBody>
+          <a:bodyPr wrap="square">
+            <a:spAutoFit/>
+          </a:bodyPr>
+          <a:lstStyle/>
+          <a:p>
+            <a:pPr algn="ctr"/>
+            <a:r>
+              <a:rPr sz="1050" b="1" i="0">
+                <a:solidFill>
+                  <a:srgbClr val="0D1B2A"/>
+                </a:solidFill>
+                <a:latin typeface="Calibri"/>
+              </a:rPr>
+              <a:t>MFCC
+(20 coeff)</a:t>
+            </a:r>
+          </a:p>
+        </p:txBody>
+      </p:sp>
+      <p:sp>
+        <p:nvSpPr>
+          <p:cNvPr id="21" name="TextBox 20"/>
+          <p:cNvSpPr txBox="1"/>
+          <p:nvPr/>
+        </p:nvSpPr>
+        <p:spPr>
+          <a:xfrm>
+            <a:off x="8266176" y="1600200"/>
+            <a:ext cx="228600" cy="320040"/>
+          </a:xfrm>
+          <a:prstGeom prst="rect">
+            <a:avLst/>
+          </a:prstGeom>
+          <a:noFill/>
+        </p:spPr>
+        <p:txBody>
+          <a:bodyPr wrap="square">
+            <a:spAutoFit/>
+          </a:bodyPr>
+          <a:lstStyle/>
+          <a:p>
+            <a:pPr algn="l"/>
+            <a:r>
+              <a:rPr sz="1300" b="0" i="0">
+                <a:solidFill>
+                  <a:srgbClr val="00D4FF"/>
+                </a:solidFill>
+                <a:latin typeface="Calibri"/>
+              </a:rPr>
+              <a:t>→</a:t>
+            </a:r>
+          </a:p>
+        </p:txBody>
+      </p:sp>
+      <p:sp>
+        <p:nvSpPr>
+          <p:cNvPr id="22" name="Rectangle 21"/>
+          <p:cNvSpPr/>
+          <p:nvPr/>
+        </p:nvSpPr>
+        <p:spPr>
+          <a:xfrm>
+            <a:off x="8595360" y="1417320"/>
+            <a:ext cx="1280160" cy="685800"/>
+          </a:xfrm>
+          <a:prstGeom prst="rect">
+            <a:avLst/>
+          </a:prstGeom>
+          <a:solidFill>
+            <a:srgbClr val="00D4FF"/>
+          </a:solidFill>
+          <a:ln>
+            <a:noFill/>
+          </a:ln>
+        </p:spPr>
+        <p:style>
+          <a:lnRef idx="1">
+            <a:schemeClr val="accent1"/>
+          </a:lnRef>
+          <a:fillRef idx="3">
+            <a:schemeClr val="accent1"/>
+          </a:fillRef>
+          <a:effectRef idx="2">
+            <a:schemeClr val="accent1"/>
+          </a:effectRef>
+          <a:fontRef idx="minor">
+            <a:schemeClr val="lt1"/>
+          </a:fontRef>
+        </p:style>
+        <p:txBody>
+          <a:bodyPr rtlCol="0" anchor="ctr"/>
+          <a:lstStyle/>
+          <a:p>
+            <a:pPr algn="ctr"/>
+            <a:endParaRPr/>
+          </a:p>
+        </p:txBody>
+      </p:sp>
+      <p:sp>
+        <p:nvSpPr>
+          <p:cNvPr id="23" name="TextBox 22"/>
+          <p:cNvSpPr txBox="1"/>
+          <p:nvPr/>
+        </p:nvSpPr>
+        <p:spPr>
+          <a:xfrm>
+            <a:off x="8595360" y="1417320"/>
+            <a:ext cx="1280160" cy="685800"/>
+          </a:xfrm>
+          <a:prstGeom prst="rect">
+            <a:avLst/>
+          </a:prstGeom>
+          <a:noFill/>
+        </p:spPr>
+        <p:txBody>
+          <a:bodyPr wrap="square">
+            <a:spAutoFit/>
+          </a:bodyPr>
+          <a:lstStyle/>
+          <a:p>
+            <a:pPr algn="ctr"/>
+            <a:r>
+              <a:rPr sz="1050" b="1" i="0">
+                <a:solidFill>
+                  <a:srgbClr val="0D1B2A"/>
+                </a:solidFill>
+                <a:latin typeface="Calibri"/>
+              </a:rPr>
+              <a:t>Mean+Std
+→ 40 feat</a:t>
+            </a:r>
+          </a:p>
+        </p:txBody>
+      </p:sp>
+      <p:sp>
+        <p:nvSpPr>
+          <p:cNvPr id="24" name="TextBox 23"/>
+          <p:cNvSpPr txBox="1"/>
+          <p:nvPr/>
+        </p:nvSpPr>
+        <p:spPr>
+          <a:xfrm>
+            <a:off x="9912096" y="1600200"/>
+            <a:ext cx="228600" cy="320040"/>
+          </a:xfrm>
+          <a:prstGeom prst="rect">
+            <a:avLst/>
+          </a:prstGeom>
+          <a:noFill/>
+        </p:spPr>
+        <p:txBody>
+          <a:bodyPr wrap="square">
+            <a:spAutoFit/>
+          </a:bodyPr>
+          <a:lstStyle/>
+          <a:p>
+            <a:pPr algn="l"/>
+            <a:r>
+              <a:rPr sz="1300" b="0" i="0">
+                <a:solidFill>
+                  <a:srgbClr val="00D4FF"/>
+                </a:solidFill>
+                <a:latin typeface="Calibri"/>
+              </a:rPr>
+              <a:t>→</a:t>
+            </a:r>
+          </a:p>
+        </p:txBody>
+      </p:sp>
+      <p:sp>
+        <p:nvSpPr>
+          <p:cNvPr id="25" name="Rectangle 24"/>
+          <p:cNvSpPr/>
+          <p:nvPr/>
+        </p:nvSpPr>
+        <p:spPr>
+          <a:xfrm>
+            <a:off x="10241280" y="1417320"/>
+            <a:ext cx="1280160" cy="685800"/>
+          </a:xfrm>
+          <a:prstGeom prst="rect">
+            <a:avLst/>
+          </a:prstGeom>
+          <a:solidFill>
+            <a:srgbClr val="00D4FF"/>
+          </a:solidFill>
+          <a:ln>
+            <a:noFill/>
+          </a:ln>
+        </p:spPr>
+        <p:style>
+          <a:lnRef idx="1">
+            <a:schemeClr val="accent1"/>
+          </a:lnRef>
+          <a:fillRef idx="3">
+            <a:schemeClr val="accent1"/>
+          </a:fillRef>
+          <a:effectRef idx="2">
+            <a:schemeClr val="accent1"/>
+          </a:effectRef>
+          <a:fontRef idx="minor">
+            <a:schemeClr val="lt1"/>
+          </a:fontRef>
+        </p:style>
+        <p:txBody>
+          <a:bodyPr rtlCol="0" anchor="ctr"/>
+          <a:lstStyle/>
+          <a:p>
+            <a:pPr algn="ctr"/>
+            <a:endParaRPr/>
+          </a:p>
+        </p:txBody>
+      </p:sp>
+      <p:sp>
+        <p:nvSpPr>
+          <p:cNvPr id="26" name="TextBox 25"/>
+          <p:cNvSpPr txBox="1"/>
+          <p:nvPr/>
+        </p:nvSpPr>
+        <p:spPr>
+          <a:xfrm>
+            <a:off x="10241280" y="1417320"/>
+            <a:ext cx="1280160" cy="685800"/>
+          </a:xfrm>
+          <a:prstGeom prst="rect">
+            <a:avLst/>
+          </a:prstGeom>
+          <a:noFill/>
+        </p:spPr>
+        <p:txBody>
+          <a:bodyPr wrap="square">
+            <a:spAutoFit/>
+          </a:bodyPr>
+          <a:lstStyle/>
+          <a:p>
+            <a:pPr algn="ctr"/>
+            <a:r>
+              <a:rPr sz="1050" b="1" i="0">
+                <a:solidFill>
+                  <a:srgbClr val="0D1B2A"/>
+                </a:solidFill>
+                <a:latin typeface="Calibri"/>
+              </a:rPr>
+              <a:t>Model</a:t>
+            </a:r>
+          </a:p>
+        </p:txBody>
+      </p:sp>
+      <p:sp>
+        <p:nvSpPr>
+          <p:cNvPr id="27" name="Rectangle 26"/>
+          <p:cNvSpPr/>
+          <p:nvPr/>
+        </p:nvSpPr>
+        <p:spPr>
+          <a:xfrm>
+            <a:off x="457200" y="2423160"/>
+            <a:ext cx="3657600" cy="2560320"/>
           </a:xfrm>
           <a:prstGeom prst="rect">
             <a:avLst/>
@@ -14309,85 +14946,130 @@
       </p:sp>
       <p:sp>
         <p:nvSpPr>
-          <p:cNvPr id="18" name="TextBox 17"/>
-          <p:cNvSpPr txBox="1"/>
-          <p:nvPr/>
-        </p:nvSpPr>
-        <p:spPr>
-          <a:xfrm>
-            <a:off x="5998464" y="1737360"/>
-            <a:ext cx="1554480" cy="731520"/>
-          </a:xfrm>
-          <a:prstGeom prst="rect">
-            <a:avLst/>
-          </a:prstGeom>
-          <a:noFill/>
-        </p:spPr>
-        <p:txBody>
-          <a:bodyPr wrap="square">
-            <a:spAutoFit/>
-          </a:bodyPr>
+          <p:cNvPr id="28" name="Rectangle 27"/>
+          <p:cNvSpPr/>
+          <p:nvPr/>
+        </p:nvSpPr>
+        <p:spPr>
+          <a:xfrm>
+            <a:off x="457200" y="2423160"/>
+            <a:ext cx="3657600" cy="91440"/>
+          </a:xfrm>
+          <a:prstGeom prst="rect">
+            <a:avLst/>
+          </a:prstGeom>
+          <a:solidFill>
+            <a:srgbClr val="00D4FF"/>
+          </a:solidFill>
+          <a:ln>
+            <a:noFill/>
+          </a:ln>
+        </p:spPr>
+        <p:style>
+          <a:lnRef idx="1">
+            <a:schemeClr val="accent1"/>
+          </a:lnRef>
+          <a:fillRef idx="3">
+            <a:schemeClr val="accent1"/>
+          </a:fillRef>
+          <a:effectRef idx="2">
+            <a:schemeClr val="accent1"/>
+          </a:effectRef>
+          <a:fontRef idx="minor">
+            <a:schemeClr val="lt1"/>
+          </a:fontRef>
+        </p:style>
+        <p:txBody>
+          <a:bodyPr rtlCol="0" anchor="ctr"/>
           <a:lstStyle/>
           <a:p>
             <a:pPr algn="ctr"/>
-            <a:r>
-              <a:rPr sz="1000" b="1" i="0">
+            <a:endParaRPr/>
+          </a:p>
+        </p:txBody>
+      </p:sp>
+      <p:sp>
+        <p:nvSpPr>
+          <p:cNvPr id="29" name="TextBox 28"/>
+          <p:cNvSpPr txBox="1"/>
+          <p:nvPr/>
+        </p:nvSpPr>
+        <p:spPr>
+          <a:xfrm>
+            <a:off x="566928" y="2542032"/>
+            <a:ext cx="3383280" cy="384048"/>
+          </a:xfrm>
+          <a:prstGeom prst="rect">
+            <a:avLst/>
+          </a:prstGeom>
+          <a:noFill/>
+        </p:spPr>
+        <p:txBody>
+          <a:bodyPr wrap="square">
+            <a:spAutoFit/>
+          </a:bodyPr>
+          <a:lstStyle/>
+          <a:p>
+            <a:pPr algn="l"/>
+            <a:r>
+              <a:rPr sz="1400" b="1" i="0">
+                <a:solidFill>
+                  <a:srgbClr val="00D4FF"/>
+                </a:solidFill>
+                <a:latin typeface="Calibri"/>
+              </a:rPr>
+              <a:t>MFCC Features</a:t>
+            </a:r>
+          </a:p>
+        </p:txBody>
+      </p:sp>
+      <p:sp>
+        <p:nvSpPr>
+          <p:cNvPr id="30" name="TextBox 29"/>
+          <p:cNvSpPr txBox="1"/>
+          <p:nvPr/>
+        </p:nvSpPr>
+        <p:spPr>
+          <a:xfrm>
+            <a:off x="566928" y="2971800"/>
+            <a:ext cx="3383280" cy="1920240"/>
+          </a:xfrm>
+          <a:prstGeom prst="rect">
+            <a:avLst/>
+          </a:prstGeom>
+          <a:noFill/>
+        </p:spPr>
+        <p:txBody>
+          <a:bodyPr wrap="square">
+            <a:spAutoFit/>
+          </a:bodyPr>
+          <a:lstStyle/>
+          <a:p>
+            <a:pPr algn="l"/>
+            <a:r>
+              <a:rPr sz="1200" b="0" i="0">
                 <a:solidFill>
                   <a:srgbClr val="FFFFFF"/>
                 </a:solidFill>
                 <a:latin typeface="Calibri"/>
               </a:rPr>
-              <a:t>Sum
-Bands</a:t>
-            </a:r>
-          </a:p>
-        </p:txBody>
-      </p:sp>
-      <p:sp>
-        <p:nvSpPr>
-          <p:cNvPr id="19" name="TextBox 18"/>
-          <p:cNvSpPr txBox="1"/>
-          <p:nvPr/>
-        </p:nvSpPr>
-        <p:spPr>
-          <a:xfrm>
-            <a:off x="7571232" y="1920240"/>
-            <a:ext cx="256032" cy="365760"/>
-          </a:xfrm>
-          <a:prstGeom prst="rect">
-            <a:avLst/>
-          </a:prstGeom>
-          <a:noFill/>
-        </p:spPr>
-        <p:txBody>
-          <a:bodyPr wrap="square">
-            <a:spAutoFit/>
-          </a:bodyPr>
-          <a:lstStyle/>
-          <a:p>
-            <a:pPr algn="l"/>
-            <a:r>
-              <a:rPr sz="1300" b="0" i="0">
-                <a:solidFill>
-                  <a:srgbClr val="00D4FF"/>
-                </a:solidFill>
-                <a:latin typeface="Calibri"/>
-              </a:rPr>
-              <a:t>→</a:t>
-            </a:r>
-          </a:p>
-        </p:txBody>
-      </p:sp>
-      <p:sp>
-        <p:nvSpPr>
-          <p:cNvPr id="20" name="Rectangle 19"/>
+              <a:t>20 coefficients per frame
+mean + std → 40-dim vector
+Mimics human hearing (Mel scale)</a:t>
+            </a:r>
+          </a:p>
+        </p:txBody>
+      </p:sp>
+      <p:sp>
+        <p:nvSpPr>
+          <p:cNvPr id="31" name="Rectangle 30"/>
           <p:cNvSpPr/>
           <p:nvPr/>
         </p:nvSpPr>
         <p:spPr>
           <a:xfrm>
-            <a:off x="7845552" y="1737360"/>
-            <a:ext cx="1554480" cy="731520"/>
+            <a:off x="4297680" y="2423160"/>
+            <a:ext cx="3657600" cy="2560320"/>
           </a:xfrm>
           <a:prstGeom prst="rect">
             <a:avLst/>
@@ -14424,85 +15106,130 @@
       </p:sp>
       <p:sp>
         <p:nvSpPr>
-          <p:cNvPr id="21" name="TextBox 20"/>
-          <p:cNvSpPr txBox="1"/>
-          <p:nvPr/>
-        </p:nvSpPr>
-        <p:spPr>
-          <a:xfrm>
-            <a:off x="7845552" y="1737360"/>
-            <a:ext cx="1554480" cy="731520"/>
-          </a:xfrm>
-          <a:prstGeom prst="rect">
-            <a:avLst/>
-          </a:prstGeom>
-          <a:noFill/>
-        </p:spPr>
-        <p:txBody>
-          <a:bodyPr wrap="square">
-            <a:spAutoFit/>
-          </a:bodyPr>
+          <p:cNvPr id="32" name="Rectangle 31"/>
+          <p:cNvSpPr/>
+          <p:nvPr/>
+        </p:nvSpPr>
+        <p:spPr>
+          <a:xfrm>
+            <a:off x="4297680" y="2423160"/>
+            <a:ext cx="3657600" cy="91440"/>
+          </a:xfrm>
+          <a:prstGeom prst="rect">
+            <a:avLst/>
+          </a:prstGeom>
+          <a:solidFill>
+            <a:srgbClr val="7B2FFF"/>
+          </a:solidFill>
+          <a:ln>
+            <a:noFill/>
+          </a:ln>
+        </p:spPr>
+        <p:style>
+          <a:lnRef idx="1">
+            <a:schemeClr val="accent1"/>
+          </a:lnRef>
+          <a:fillRef idx="3">
+            <a:schemeClr val="accent1"/>
+          </a:fillRef>
+          <a:effectRef idx="2">
+            <a:schemeClr val="accent1"/>
+          </a:effectRef>
+          <a:fontRef idx="minor">
+            <a:schemeClr val="lt1"/>
+          </a:fontRef>
+        </p:style>
+        <p:txBody>
+          <a:bodyPr rtlCol="0" anchor="ctr"/>
           <a:lstStyle/>
           <a:p>
             <a:pPr algn="ctr"/>
-            <a:r>
-              <a:rPr sz="1000" b="1" i="0">
+            <a:endParaRPr/>
+          </a:p>
+        </p:txBody>
+      </p:sp>
+      <p:sp>
+        <p:nvSpPr>
+          <p:cNvPr id="33" name="TextBox 32"/>
+          <p:cNvSpPr txBox="1"/>
+          <p:nvPr/>
+        </p:nvSpPr>
+        <p:spPr>
+          <a:xfrm>
+            <a:off x="4407408" y="2542032"/>
+            <a:ext cx="3383280" cy="384048"/>
+          </a:xfrm>
+          <a:prstGeom prst="rect">
+            <a:avLst/>
+          </a:prstGeom>
+          <a:noFill/>
+        </p:spPr>
+        <p:txBody>
+          <a:bodyPr wrap="square">
+            <a:spAutoFit/>
+          </a:bodyPr>
+          <a:lstStyle/>
+          <a:p>
+            <a:pPr algn="l"/>
+            <a:r>
+              <a:rPr sz="1400" b="1" i="0">
+                <a:solidFill>
+                  <a:srgbClr val="7B2FFF"/>
+                </a:solidFill>
+                <a:latin typeface="Calibri"/>
+              </a:rPr>
+              <a:t>SVM — Kernel RBF</a:t>
+            </a:r>
+          </a:p>
+        </p:txBody>
+      </p:sp>
+      <p:sp>
+        <p:nvSpPr>
+          <p:cNvPr id="34" name="TextBox 33"/>
+          <p:cNvSpPr txBox="1"/>
+          <p:nvPr/>
+        </p:nvSpPr>
+        <p:spPr>
+          <a:xfrm>
+            <a:off x="4407408" y="2971800"/>
+            <a:ext cx="3383280" cy="1920240"/>
+          </a:xfrm>
+          <a:prstGeom prst="rect">
+            <a:avLst/>
+          </a:prstGeom>
+          <a:noFill/>
+        </p:spPr>
+        <p:txBody>
+          <a:bodyPr wrap="square">
+            <a:spAutoFit/>
+          </a:bodyPr>
+          <a:lstStyle/>
+          <a:p>
+            <a:pPr algn="l"/>
+            <a:r>
+              <a:rPr sz="1200" b="0" i="0">
                 <a:solidFill>
                   <a:srgbClr val="FFFFFF"/>
                 </a:solidFill>
                 <a:latin typeface="Calibri"/>
               </a:rPr>
-              <a:t>Visualize
-FFT/Wave</a:t>
-            </a:r>
-          </a:p>
-        </p:txBody>
-      </p:sp>
-      <p:sp>
-        <p:nvSpPr>
-          <p:cNvPr id="22" name="TextBox 21"/>
-          <p:cNvSpPr txBox="1"/>
-          <p:nvPr/>
-        </p:nvSpPr>
-        <p:spPr>
-          <a:xfrm>
-            <a:off x="9418320" y="1920240"/>
-            <a:ext cx="256032" cy="365760"/>
-          </a:xfrm>
-          <a:prstGeom prst="rect">
-            <a:avLst/>
-          </a:prstGeom>
-          <a:noFill/>
-        </p:spPr>
-        <p:txBody>
-          <a:bodyPr wrap="square">
-            <a:spAutoFit/>
-          </a:bodyPr>
-          <a:lstStyle/>
-          <a:p>
-            <a:pPr algn="l"/>
-            <a:r>
-              <a:rPr sz="1300" b="0" i="0">
-                <a:solidFill>
-                  <a:srgbClr val="00D4FF"/>
-                </a:solidFill>
-                <a:latin typeface="Calibri"/>
-              </a:rPr>
-              <a:t>→</a:t>
-            </a:r>
-          </a:p>
-        </p:txBody>
-      </p:sp>
-      <p:sp>
-        <p:nvSpPr>
-          <p:cNvPr id="23" name="Rectangle 22"/>
+              <a:t>K(x,x') = exp(−γ||x−x'||²)
+Max-margin hyperplane
+Accuracy: 62.6%</a:t>
+            </a:r>
+          </a:p>
+        </p:txBody>
+      </p:sp>
+      <p:sp>
+        <p:nvSpPr>
+          <p:cNvPr id="35" name="Rectangle 34"/>
           <p:cNvSpPr/>
           <p:nvPr/>
         </p:nvSpPr>
         <p:spPr>
           <a:xfrm>
-            <a:off x="9692640" y="1737360"/>
-            <a:ext cx="1554480" cy="731520"/>
+            <a:off x="8138160" y="2423160"/>
+            <a:ext cx="3657600" cy="2560320"/>
           </a:xfrm>
           <a:prstGeom prst="rect">
             <a:avLst/>
@@ -14539,91 +15266,20 @@
       </p:sp>
       <p:sp>
         <p:nvSpPr>
-          <p:cNvPr id="24" name="TextBox 23"/>
-          <p:cNvSpPr txBox="1"/>
-          <p:nvPr/>
-        </p:nvSpPr>
-        <p:spPr>
-          <a:xfrm>
-            <a:off x="9692640" y="1737360"/>
-            <a:ext cx="1554480" cy="731520"/>
-          </a:xfrm>
-          <a:prstGeom prst="rect">
-            <a:avLst/>
-          </a:prstGeom>
-          <a:noFill/>
-        </p:spPr>
-        <p:txBody>
-          <a:bodyPr wrap="square">
-            <a:spAutoFit/>
-          </a:bodyPr>
-          <a:lstStyle/>
-          <a:p>
-            <a:pPr algn="ctr"/>
-            <a:r>
-              <a:rPr sz="1000" b="1" i="0">
-                <a:solidFill>
-                  <a:srgbClr val="FFFFFF"/>
-                </a:solidFill>
-                <a:latin typeface="Calibri"/>
-              </a:rPr>
-              <a:t>Save
-.wav</a:t>
-            </a:r>
-          </a:p>
-        </p:txBody>
-      </p:sp>
-      <p:sp>
-        <p:nvSpPr>
-          <p:cNvPr id="25" name="TextBox 24"/>
-          <p:cNvSpPr txBox="1"/>
-          <p:nvPr/>
-        </p:nvSpPr>
-        <p:spPr>
-          <a:xfrm>
-            <a:off x="457200" y="2834640"/>
-            <a:ext cx="5486400" cy="347472"/>
-          </a:xfrm>
-          <a:prstGeom prst="rect">
-            <a:avLst/>
-          </a:prstGeom>
-          <a:noFill/>
-        </p:spPr>
-        <p:txBody>
-          <a:bodyPr wrap="square">
-            <a:spAutoFit/>
-          </a:bodyPr>
-          <a:lstStyle/>
-          <a:p>
-            <a:pPr algn="l"/>
-            <a:r>
-              <a:rPr sz="1300" b="1" i="0">
-                <a:solidFill>
-                  <a:srgbClr val="7B2FFF"/>
-                </a:solidFill>
-                <a:latin typeface="Calibri"/>
-              </a:rPr>
-              <a:t>ML Pipeline</a:t>
-            </a:r>
-          </a:p>
-        </p:txBody>
-      </p:sp>
-      <p:sp>
-        <p:nvSpPr>
-          <p:cNvPr id="26" name="Rectangle 25"/>
+          <p:cNvPr id="36" name="Rectangle 35"/>
           <p:cNvSpPr/>
           <p:nvPr/>
         </p:nvSpPr>
         <p:spPr>
           <a:xfrm>
-            <a:off x="457200" y="3246120"/>
-            <a:ext cx="1920240" cy="731520"/>
+            <a:off x="8138160" y="2423160"/>
+            <a:ext cx="3657600" cy="91440"/>
           </a:xfrm>
           <a:prstGeom prst="rect">
             <a:avLst/>
           </a:prstGeom>
           <a:solidFill>
-            <a:srgbClr val="152B3E"/>
+            <a:srgbClr val="00C896"/>
           </a:solidFill>
           <a:ln>
             <a:noFill/>
@@ -14654,14 +15310,86 @@
       </p:sp>
       <p:sp>
         <p:nvSpPr>
-          <p:cNvPr id="27" name="TextBox 26"/>
-          <p:cNvSpPr txBox="1"/>
-          <p:nvPr/>
-        </p:nvSpPr>
-        <p:spPr>
-          <a:xfrm>
-            <a:off x="457200" y="3246120"/>
-            <a:ext cx="1920240" cy="731520"/>
+          <p:cNvPr id="37" name="TextBox 36"/>
+          <p:cNvSpPr txBox="1"/>
+          <p:nvPr/>
+        </p:nvSpPr>
+        <p:spPr>
+          <a:xfrm>
+            <a:off x="8247888" y="2542032"/>
+            <a:ext cx="3383280" cy="384048"/>
+          </a:xfrm>
+          <a:prstGeom prst="rect">
+            <a:avLst/>
+          </a:prstGeom>
+          <a:noFill/>
+        </p:spPr>
+        <p:txBody>
+          <a:bodyPr wrap="square">
+            <a:spAutoFit/>
+          </a:bodyPr>
+          <a:lstStyle/>
+          <a:p>
+            <a:pPr algn="l"/>
+            <a:r>
+              <a:rPr sz="1400" b="1" i="0">
+                <a:solidFill>
+                  <a:srgbClr val="00C896"/>
+                </a:solidFill>
+                <a:latin typeface="Calibri"/>
+              </a:rPr>
+              <a:t>Random Forest</a:t>
+            </a:r>
+          </a:p>
+        </p:txBody>
+      </p:sp>
+      <p:sp>
+        <p:nvSpPr>
+          <p:cNvPr id="38" name="TextBox 37"/>
+          <p:cNvSpPr txBox="1"/>
+          <p:nvPr/>
+        </p:nvSpPr>
+        <p:spPr>
+          <a:xfrm>
+            <a:off x="8247888" y="2971800"/>
+            <a:ext cx="3383280" cy="1920240"/>
+          </a:xfrm>
+          <a:prstGeom prst="rect">
+            <a:avLst/>
+          </a:prstGeom>
+          <a:noFill/>
+        </p:spPr>
+        <p:txBody>
+          <a:bodyPr wrap="square">
+            <a:spAutoFit/>
+          </a:bodyPr>
+          <a:lstStyle/>
+          <a:p>
+            <a:pPr algn="l"/>
+            <a:r>
+              <a:rPr sz="1200" b="0" i="0">
+                <a:solidFill>
+                  <a:srgbClr val="FFFFFF"/>
+                </a:solidFill>
+                <a:latin typeface="Calibri"/>
+              </a:rPr>
+              <a:t>Ensemble of Decision Trees
+Majority voting → low overfitting
+Accuracy: 51.6%</a:t>
+            </a:r>
+          </a:p>
+        </p:txBody>
+      </p:sp>
+      <p:sp>
+        <p:nvSpPr>
+          <p:cNvPr id="39" name="TextBox 38"/>
+          <p:cNvSpPr txBox="1"/>
+          <p:nvPr/>
+        </p:nvSpPr>
+        <p:spPr>
+          <a:xfrm>
+            <a:off x="457200" y="5212080"/>
+            <a:ext cx="10972800" cy="457200"/>
           </a:xfrm>
           <a:prstGeom prst="rect">
             <a:avLst/>
@@ -14676,474 +15404,13 @@
           <a:p>
             <a:pPr algn="ctr"/>
             <a:r>
-              <a:rPr sz="1000" b="1" i="0">
-                <a:solidFill>
-                  <a:srgbClr val="FFFFFF"/>
-                </a:solidFill>
-                <a:latin typeface="Calibri"/>
-              </a:rPr>
-              <a:t>Load
-GTZAN</a:t>
-            </a:r>
-          </a:p>
-        </p:txBody>
-      </p:sp>
-      <p:sp>
-        <p:nvSpPr>
-          <p:cNvPr id="28" name="TextBox 27"/>
-          <p:cNvSpPr txBox="1"/>
-          <p:nvPr/>
-        </p:nvSpPr>
-        <p:spPr>
-          <a:xfrm>
-            <a:off x="2395728" y="3429000"/>
-            <a:ext cx="256032" cy="365760"/>
-          </a:xfrm>
-          <a:prstGeom prst="rect">
-            <a:avLst/>
-          </a:prstGeom>
-          <a:noFill/>
-        </p:spPr>
-        <p:txBody>
-          <a:bodyPr wrap="square">
-            <a:spAutoFit/>
-          </a:bodyPr>
-          <a:lstStyle/>
-          <a:p>
-            <a:pPr algn="l"/>
-            <a:r>
-              <a:rPr sz="1300" b="0" i="0">
-                <a:solidFill>
-                  <a:srgbClr val="7B2FFF"/>
-                </a:solidFill>
-                <a:latin typeface="Calibri"/>
-              </a:rPr>
-              <a:t>→</a:t>
-            </a:r>
-          </a:p>
-        </p:txBody>
-      </p:sp>
-      <p:sp>
-        <p:nvSpPr>
-          <p:cNvPr id="29" name="Rectangle 28"/>
-          <p:cNvSpPr/>
-          <p:nvPr/>
-        </p:nvSpPr>
-        <p:spPr>
-          <a:xfrm>
-            <a:off x="2670048" y="3246120"/>
-            <a:ext cx="1920240" cy="731520"/>
-          </a:xfrm>
-          <a:prstGeom prst="rect">
-            <a:avLst/>
-          </a:prstGeom>
-          <a:solidFill>
-            <a:srgbClr val="152B3E"/>
-          </a:solidFill>
-          <a:ln>
-            <a:noFill/>
-          </a:ln>
-        </p:spPr>
-        <p:style>
-          <a:lnRef idx="1">
-            <a:schemeClr val="accent1"/>
-          </a:lnRef>
-          <a:fillRef idx="3">
-            <a:schemeClr val="accent1"/>
-          </a:fillRef>
-          <a:effectRef idx="2">
-            <a:schemeClr val="accent1"/>
-          </a:effectRef>
-          <a:fontRef idx="minor">
-            <a:schemeClr val="lt1"/>
-          </a:fontRef>
-        </p:style>
-        <p:txBody>
-          <a:bodyPr rtlCol="0" anchor="ctr"/>
-          <a:lstStyle/>
-          <a:p>
-            <a:pPr algn="ctr"/>
-            <a:endParaRPr/>
-          </a:p>
-        </p:txBody>
-      </p:sp>
-      <p:sp>
-        <p:nvSpPr>
-          <p:cNvPr id="30" name="TextBox 29"/>
-          <p:cNvSpPr txBox="1"/>
-          <p:nvPr/>
-        </p:nvSpPr>
-        <p:spPr>
-          <a:xfrm>
-            <a:off x="2670048" y="3246120"/>
-            <a:ext cx="1920240" cy="731520"/>
-          </a:xfrm>
-          <a:prstGeom prst="rect">
-            <a:avLst/>
-          </a:prstGeom>
-          <a:noFill/>
-        </p:spPr>
-        <p:txBody>
-          <a:bodyPr wrap="square">
-            <a:spAutoFit/>
-          </a:bodyPr>
-          <a:lstStyle/>
-          <a:p>
-            <a:pPr algn="ctr"/>
-            <a:r>
-              <a:rPr sz="1000" b="1" i="0">
-                <a:solidFill>
-                  <a:srgbClr val="FFFFFF"/>
-                </a:solidFill>
-                <a:latin typeface="Calibri"/>
-              </a:rPr>
-              <a:t>Extract
-MFCC×40</a:t>
-            </a:r>
-          </a:p>
-        </p:txBody>
-      </p:sp>
-      <p:sp>
-        <p:nvSpPr>
-          <p:cNvPr id="31" name="TextBox 30"/>
-          <p:cNvSpPr txBox="1"/>
-          <p:nvPr/>
-        </p:nvSpPr>
-        <p:spPr>
-          <a:xfrm>
-            <a:off x="4608576" y="3429000"/>
-            <a:ext cx="256032" cy="365760"/>
-          </a:xfrm>
-          <a:prstGeom prst="rect">
-            <a:avLst/>
-          </a:prstGeom>
-          <a:noFill/>
-        </p:spPr>
-        <p:txBody>
-          <a:bodyPr wrap="square">
-            <a:spAutoFit/>
-          </a:bodyPr>
-          <a:lstStyle/>
-          <a:p>
-            <a:pPr algn="l"/>
-            <a:r>
-              <a:rPr sz="1300" b="0" i="0">
-                <a:solidFill>
-                  <a:srgbClr val="7B2FFF"/>
-                </a:solidFill>
-                <a:latin typeface="Calibri"/>
-              </a:rPr>
-              <a:t>→</a:t>
-            </a:r>
-          </a:p>
-        </p:txBody>
-      </p:sp>
-      <p:sp>
-        <p:nvSpPr>
-          <p:cNvPr id="32" name="Rectangle 31"/>
-          <p:cNvSpPr/>
-          <p:nvPr/>
-        </p:nvSpPr>
-        <p:spPr>
-          <a:xfrm>
-            <a:off x="4882896" y="3246120"/>
-            <a:ext cx="1920240" cy="731520"/>
-          </a:xfrm>
-          <a:prstGeom prst="rect">
-            <a:avLst/>
-          </a:prstGeom>
-          <a:solidFill>
-            <a:srgbClr val="152B3E"/>
-          </a:solidFill>
-          <a:ln>
-            <a:noFill/>
-          </a:ln>
-        </p:spPr>
-        <p:style>
-          <a:lnRef idx="1">
-            <a:schemeClr val="accent1"/>
-          </a:lnRef>
-          <a:fillRef idx="3">
-            <a:schemeClr val="accent1"/>
-          </a:fillRef>
-          <a:effectRef idx="2">
-            <a:schemeClr val="accent1"/>
-          </a:effectRef>
-          <a:fontRef idx="minor">
-            <a:schemeClr val="lt1"/>
-          </a:fontRef>
-        </p:style>
-        <p:txBody>
-          <a:bodyPr rtlCol="0" anchor="ctr"/>
-          <a:lstStyle/>
-          <a:p>
-            <a:pPr algn="ctr"/>
-            <a:endParaRPr/>
-          </a:p>
-        </p:txBody>
-      </p:sp>
-      <p:sp>
-        <p:nvSpPr>
-          <p:cNvPr id="33" name="TextBox 32"/>
-          <p:cNvSpPr txBox="1"/>
-          <p:nvPr/>
-        </p:nvSpPr>
-        <p:spPr>
-          <a:xfrm>
-            <a:off x="4882896" y="3246120"/>
-            <a:ext cx="1920240" cy="731520"/>
-          </a:xfrm>
-          <a:prstGeom prst="rect">
-            <a:avLst/>
-          </a:prstGeom>
-          <a:noFill/>
-        </p:spPr>
-        <p:txBody>
-          <a:bodyPr wrap="square">
-            <a:spAutoFit/>
-          </a:bodyPr>
-          <a:lstStyle/>
-          <a:p>
-            <a:pPr algn="ctr"/>
-            <a:r>
-              <a:rPr sz="1000" b="1" i="0">
-                <a:solidFill>
-                  <a:srgbClr val="FFFFFF"/>
-                </a:solidFill>
-                <a:latin typeface="Calibri"/>
-              </a:rPr>
-              <a:t>StandardScaler
-Normalize</a:t>
-            </a:r>
-          </a:p>
-        </p:txBody>
-      </p:sp>
-      <p:sp>
-        <p:nvSpPr>
-          <p:cNvPr id="34" name="TextBox 33"/>
-          <p:cNvSpPr txBox="1"/>
-          <p:nvPr/>
-        </p:nvSpPr>
-        <p:spPr>
-          <a:xfrm>
-            <a:off x="6821424" y="3429000"/>
-            <a:ext cx="256032" cy="365760"/>
-          </a:xfrm>
-          <a:prstGeom prst="rect">
-            <a:avLst/>
-          </a:prstGeom>
-          <a:noFill/>
-        </p:spPr>
-        <p:txBody>
-          <a:bodyPr wrap="square">
-            <a:spAutoFit/>
-          </a:bodyPr>
-          <a:lstStyle/>
-          <a:p>
-            <a:pPr algn="l"/>
-            <a:r>
-              <a:rPr sz="1300" b="0" i="0">
-                <a:solidFill>
-                  <a:srgbClr val="7B2FFF"/>
-                </a:solidFill>
-                <a:latin typeface="Calibri"/>
-              </a:rPr>
-              <a:t>→</a:t>
-            </a:r>
-          </a:p>
-        </p:txBody>
-      </p:sp>
-      <p:sp>
-        <p:nvSpPr>
-          <p:cNvPr id="35" name="Rectangle 34"/>
-          <p:cNvSpPr/>
-          <p:nvPr/>
-        </p:nvSpPr>
-        <p:spPr>
-          <a:xfrm>
-            <a:off x="7095744" y="3246120"/>
-            <a:ext cx="1920240" cy="731520"/>
-          </a:xfrm>
-          <a:prstGeom prst="rect">
-            <a:avLst/>
-          </a:prstGeom>
-          <a:solidFill>
-            <a:srgbClr val="152B3E"/>
-          </a:solidFill>
-          <a:ln>
-            <a:noFill/>
-          </a:ln>
-        </p:spPr>
-        <p:style>
-          <a:lnRef idx="1">
-            <a:schemeClr val="accent1"/>
-          </a:lnRef>
-          <a:fillRef idx="3">
-            <a:schemeClr val="accent1"/>
-          </a:fillRef>
-          <a:effectRef idx="2">
-            <a:schemeClr val="accent1"/>
-          </a:effectRef>
-          <a:fontRef idx="minor">
-            <a:schemeClr val="lt1"/>
-          </a:fontRef>
-        </p:style>
-        <p:txBody>
-          <a:bodyPr rtlCol="0" anchor="ctr"/>
-          <a:lstStyle/>
-          <a:p>
-            <a:pPr algn="ctr"/>
-            <a:endParaRPr/>
-          </a:p>
-        </p:txBody>
-      </p:sp>
-      <p:sp>
-        <p:nvSpPr>
-          <p:cNvPr id="36" name="TextBox 35"/>
-          <p:cNvSpPr txBox="1"/>
-          <p:nvPr/>
-        </p:nvSpPr>
-        <p:spPr>
-          <a:xfrm>
-            <a:off x="7095744" y="3246120"/>
-            <a:ext cx="1920240" cy="731520"/>
-          </a:xfrm>
-          <a:prstGeom prst="rect">
-            <a:avLst/>
-          </a:prstGeom>
-          <a:noFill/>
-        </p:spPr>
-        <p:txBody>
-          <a:bodyPr wrap="square">
-            <a:spAutoFit/>
-          </a:bodyPr>
-          <a:lstStyle/>
-          <a:p>
-            <a:pPr algn="ctr"/>
-            <a:r>
-              <a:rPr sz="1000" b="1" i="0">
-                <a:solidFill>
-                  <a:srgbClr val="FFFFFF"/>
-                </a:solidFill>
-                <a:latin typeface="Calibri"/>
-              </a:rPr>
-              <a:t>Train
-SVM/RF</a:t>
-            </a:r>
-          </a:p>
-        </p:txBody>
-      </p:sp>
-      <p:sp>
-        <p:nvSpPr>
-          <p:cNvPr id="37" name="TextBox 36"/>
-          <p:cNvSpPr txBox="1"/>
-          <p:nvPr/>
-        </p:nvSpPr>
-        <p:spPr>
-          <a:xfrm>
-            <a:off x="9034272" y="3429000"/>
-            <a:ext cx="256032" cy="365760"/>
-          </a:xfrm>
-          <a:prstGeom prst="rect">
-            <a:avLst/>
-          </a:prstGeom>
-          <a:noFill/>
-        </p:spPr>
-        <p:txBody>
-          <a:bodyPr wrap="square">
-            <a:spAutoFit/>
-          </a:bodyPr>
-          <a:lstStyle/>
-          <a:p>
-            <a:pPr algn="l"/>
-            <a:r>
-              <a:rPr sz="1300" b="0" i="0">
-                <a:solidFill>
-                  <a:srgbClr val="7B2FFF"/>
-                </a:solidFill>
-                <a:latin typeface="Calibri"/>
-              </a:rPr>
-              <a:t>→</a:t>
-            </a:r>
-          </a:p>
-        </p:txBody>
-      </p:sp>
-      <p:sp>
-        <p:nvSpPr>
-          <p:cNvPr id="38" name="Rectangle 37"/>
-          <p:cNvSpPr/>
-          <p:nvPr/>
-        </p:nvSpPr>
-        <p:spPr>
-          <a:xfrm>
-            <a:off x="9308592" y="3246120"/>
-            <a:ext cx="1920240" cy="731520"/>
-          </a:xfrm>
-          <a:prstGeom prst="rect">
-            <a:avLst/>
-          </a:prstGeom>
-          <a:solidFill>
-            <a:srgbClr val="152B3E"/>
-          </a:solidFill>
-          <a:ln>
-            <a:noFill/>
-          </a:ln>
-        </p:spPr>
-        <p:style>
-          <a:lnRef idx="1">
-            <a:schemeClr val="accent1"/>
-          </a:lnRef>
-          <a:fillRef idx="3">
-            <a:schemeClr val="accent1"/>
-          </a:fillRef>
-          <a:effectRef idx="2">
-            <a:schemeClr val="accent1"/>
-          </a:effectRef>
-          <a:fontRef idx="minor">
-            <a:schemeClr val="lt1"/>
-          </a:fontRef>
-        </p:style>
-        <p:txBody>
-          <a:bodyPr rtlCol="0" anchor="ctr"/>
-          <a:lstStyle/>
-          <a:p>
-            <a:pPr algn="ctr"/>
-            <a:endParaRPr/>
-          </a:p>
-        </p:txBody>
-      </p:sp>
-      <p:sp>
-        <p:nvSpPr>
-          <p:cNvPr id="39" name="TextBox 38"/>
-          <p:cNvSpPr txBox="1"/>
-          <p:nvPr/>
-        </p:nvSpPr>
-        <p:spPr>
-          <a:xfrm>
-            <a:off x="9308592" y="3246120"/>
-            <a:ext cx="1920240" cy="731520"/>
-          </a:xfrm>
-          <a:prstGeom prst="rect">
-            <a:avLst/>
-          </a:prstGeom>
-          <a:noFill/>
-        </p:spPr>
-        <p:txBody>
-          <a:bodyPr wrap="square">
-            <a:spAutoFit/>
-          </a:bodyPr>
-          <a:lstStyle/>
-          <a:p>
-            <a:pPr algn="ctr"/>
-            <a:r>
-              <a:rPr sz="1000" b="1" i="0">
-                <a:solidFill>
-                  <a:srgbClr val="FFFFFF"/>
-                </a:solidFill>
-                <a:latin typeface="Calibri"/>
-              </a:rPr>
-              <a:t>Evaluate
-Accuracy</a:t>
+              <a:rPr sz="1200" b="0" i="1">
+                <a:solidFill>
+                  <a:srgbClr val="B0C8D8"/>
+                </a:solidFill>
+                <a:latin typeface="Calibri"/>
+              </a:rPr>
+              <a:t>Pipeline:  Audio  →  Feature Extraction  →  StandardScaler  →  Model  →  Prediction</a:t>
             </a:r>
           </a:p>
         </p:txBody>
@@ -15151,273 +15418,6 @@
       <p:sp>
         <p:nvSpPr>
           <p:cNvPr id="40" name="TextBox 39"/>
-          <p:cNvSpPr txBox="1"/>
-          <p:nvPr/>
-        </p:nvSpPr>
-        <p:spPr>
-          <a:xfrm>
-            <a:off x="457200" y="4206240"/>
-            <a:ext cx="5486400" cy="365760"/>
-          </a:xfrm>
-          <a:prstGeom prst="rect">
-            <a:avLst/>
-          </a:prstGeom>
-          <a:noFill/>
-        </p:spPr>
-        <p:txBody>
-          <a:bodyPr wrap="square">
-            <a:spAutoFit/>
-          </a:bodyPr>
-          <a:lstStyle/>
-          <a:p>
-            <a:pPr algn="l"/>
-            <a:r>
-              <a:rPr sz="1500" b="1" i="0">
-                <a:solidFill>
-                  <a:srgbClr val="FFFFFF"/>
-                </a:solidFill>
-                <a:latin typeface="Calibri"/>
-              </a:rPr>
-              <a:t>Phương Pháp Test</a:t>
-            </a:r>
-          </a:p>
-        </p:txBody>
-      </p:sp>
-      <p:sp>
-        <p:nvSpPr>
-          <p:cNvPr id="41" name="Rectangle 40"/>
-          <p:cNvSpPr/>
-          <p:nvPr/>
-        </p:nvSpPr>
-        <p:spPr>
-          <a:xfrm>
-            <a:off x="457200" y="4663440"/>
-            <a:ext cx="5394960" cy="1737360"/>
-          </a:xfrm>
-          <a:prstGeom prst="rect">
-            <a:avLst/>
-          </a:prstGeom>
-          <a:solidFill>
-            <a:srgbClr val="152B3E"/>
-          </a:solidFill>
-          <a:ln>
-            <a:noFill/>
-          </a:ln>
-        </p:spPr>
-        <p:style>
-          <a:lnRef idx="1">
-            <a:schemeClr val="accent1"/>
-          </a:lnRef>
-          <a:fillRef idx="3">
-            <a:schemeClr val="accent1"/>
-          </a:fillRef>
-          <a:effectRef idx="2">
-            <a:schemeClr val="accent1"/>
-          </a:effectRef>
-          <a:fontRef idx="minor">
-            <a:schemeClr val="lt1"/>
-          </a:fontRef>
-        </p:style>
-        <p:txBody>
-          <a:bodyPr rtlCol="0" anchor="ctr"/>
-          <a:lstStyle/>
-          <a:p>
-            <a:pPr algn="ctr"/>
-            <a:endParaRPr/>
-          </a:p>
-        </p:txBody>
-      </p:sp>
-      <p:sp>
-        <p:nvSpPr>
-          <p:cNvPr id="42" name="TextBox 41"/>
-          <p:cNvSpPr txBox="1"/>
-          <p:nvPr/>
-        </p:nvSpPr>
-        <p:spPr>
-          <a:xfrm>
-            <a:off x="594360" y="4736592"/>
-            <a:ext cx="5029200" cy="347472"/>
-          </a:xfrm>
-          <a:prstGeom prst="rect">
-            <a:avLst/>
-          </a:prstGeom>
-          <a:noFill/>
-        </p:spPr>
-        <p:txBody>
-          <a:bodyPr wrap="square">
-            <a:spAutoFit/>
-          </a:bodyPr>
-          <a:lstStyle/>
-          <a:p>
-            <a:pPr algn="l"/>
-            <a:r>
-              <a:rPr sz="1300" b="1" i="0">
-                <a:solidFill>
-                  <a:srgbClr val="00D4FF"/>
-                </a:solidFill>
-                <a:latin typeface="Calibri"/>
-              </a:rPr>
-              <a:t>Equalizer</a:t>
-            </a:r>
-          </a:p>
-        </p:txBody>
-      </p:sp>
-      <p:sp>
-        <p:nvSpPr>
-          <p:cNvPr id="43" name="TextBox 42"/>
-          <p:cNvSpPr txBox="1"/>
-          <p:nvPr/>
-        </p:nvSpPr>
-        <p:spPr>
-          <a:xfrm>
-            <a:off x="594360" y="5120640"/>
-            <a:ext cx="5029200" cy="1188720"/>
-          </a:xfrm>
-          <a:prstGeom prst="rect">
-            <a:avLst/>
-          </a:prstGeom>
-          <a:noFill/>
-        </p:spPr>
-        <p:txBody>
-          <a:bodyPr wrap="square">
-            <a:spAutoFit/>
-          </a:bodyPr>
-          <a:lstStyle/>
-          <a:p>
-            <a:pPr algn="l"/>
-            <a:r>
-              <a:rPr sz="1200" b="0" i="0">
-                <a:solidFill>
-                  <a:srgbClr val="FFFFFF"/>
-                </a:solidFill>
-                <a:latin typeface="Calibri"/>
-              </a:rPr>
-              <a:t>• Sine đơn tần (per band)
-• White noise (all bands)
-• File nhạc thực</a:t>
-            </a:r>
-          </a:p>
-        </p:txBody>
-      </p:sp>
-      <p:sp>
-        <p:nvSpPr>
-          <p:cNvPr id="44" name="Rectangle 43"/>
-          <p:cNvSpPr/>
-          <p:nvPr/>
-        </p:nvSpPr>
-        <p:spPr>
-          <a:xfrm>
-            <a:off x="6126480" y="4663440"/>
-            <a:ext cx="5394960" cy="1737360"/>
-          </a:xfrm>
-          <a:prstGeom prst="rect">
-            <a:avLst/>
-          </a:prstGeom>
-          <a:solidFill>
-            <a:srgbClr val="152B3E"/>
-          </a:solidFill>
-          <a:ln>
-            <a:noFill/>
-          </a:ln>
-        </p:spPr>
-        <p:style>
-          <a:lnRef idx="1">
-            <a:schemeClr val="accent1"/>
-          </a:lnRef>
-          <a:fillRef idx="3">
-            <a:schemeClr val="accent1"/>
-          </a:fillRef>
-          <a:effectRef idx="2">
-            <a:schemeClr val="accent1"/>
-          </a:effectRef>
-          <a:fontRef idx="minor">
-            <a:schemeClr val="lt1"/>
-          </a:fontRef>
-        </p:style>
-        <p:txBody>
-          <a:bodyPr rtlCol="0" anchor="ctr"/>
-          <a:lstStyle/>
-          <a:p>
-            <a:pPr algn="ctr"/>
-            <a:endParaRPr/>
-          </a:p>
-        </p:txBody>
-      </p:sp>
-      <p:sp>
-        <p:nvSpPr>
-          <p:cNvPr id="45" name="TextBox 44"/>
-          <p:cNvSpPr txBox="1"/>
-          <p:nvPr/>
-        </p:nvSpPr>
-        <p:spPr>
-          <a:xfrm>
-            <a:off x="6263640" y="4736592"/>
-            <a:ext cx="5029200" cy="347472"/>
-          </a:xfrm>
-          <a:prstGeom prst="rect">
-            <a:avLst/>
-          </a:prstGeom>
-          <a:noFill/>
-        </p:spPr>
-        <p:txBody>
-          <a:bodyPr wrap="square">
-            <a:spAutoFit/>
-          </a:bodyPr>
-          <a:lstStyle/>
-          <a:p>
-            <a:pPr algn="l"/>
-            <a:r>
-              <a:rPr sz="1300" b="1" i="0">
-                <a:solidFill>
-                  <a:srgbClr val="7B2FFF"/>
-                </a:solidFill>
-                <a:latin typeface="Calibri"/>
-              </a:rPr>
-              <a:t>ML Model</a:t>
-            </a:r>
-          </a:p>
-        </p:txBody>
-      </p:sp>
-      <p:sp>
-        <p:nvSpPr>
-          <p:cNvPr id="46" name="TextBox 45"/>
-          <p:cNvSpPr txBox="1"/>
-          <p:nvPr/>
-        </p:nvSpPr>
-        <p:spPr>
-          <a:xfrm>
-            <a:off x="6263640" y="5120640"/>
-            <a:ext cx="5029200" cy="1188720"/>
-          </a:xfrm>
-          <a:prstGeom prst="rect">
-            <a:avLst/>
-          </a:prstGeom>
-          <a:noFill/>
-        </p:spPr>
-        <p:txBody>
-          <a:bodyPr wrap="square">
-            <a:spAutoFit/>
-          </a:bodyPr>
-          <a:lstStyle/>
-          <a:p>
-            <a:pPr algn="l"/>
-            <a:r>
-              <a:rPr sz="1200" b="0" i="0">
-                <a:solidFill>
-                  <a:srgbClr val="FFFFFF"/>
-                </a:solidFill>
-                <a:latin typeface="Calibri"/>
-              </a:rPr>
-              <a:t>• Tập test riêng biệt
-• Accuracy/Precision/F1
-• Confusion Matrix</a:t>
-            </a:r>
-          </a:p>
-        </p:txBody>
-      </p:sp>
-      <p:sp>
-        <p:nvSpPr>
-          <p:cNvPr id="47" name="TextBox 46"/>
           <p:cNvSpPr txBox="1"/>
           <p:nvPr/>
         </p:nvSpPr>
@@ -15445,7 +15445,7 @@
                 </a:solidFill>
                 <a:latin typeface="Calibri"/>
               </a:rPr>
-              <a:t>7 / 13</a:t>
+              <a:t>6 / 13</a:t>
             </a:r>
           </a:p>
         </p:txBody>
